--- a/08_Module_8_Documentation_Delivery/EduVision_Presentation.pptx
+++ b/08_Module_8_Documentation_Delivery/EduVision_Presentation.pptx
@@ -4,9 +4,6 @@
   <p:sldMasterIdLst>
     <p:sldMasterId id="2147483648" r:id="rId1"/>
   </p:sldMasterIdLst>
-  <p:notesMasterIdLst>
-    <p:notesMasterId r:id="rId19"/>
-  </p:notesMasterIdLst>
   <p:sldIdLst>
     <p:sldId id="256" r:id="rId2"/>
     <p:sldId id="257" r:id="rId3"/>
@@ -26,6 +23,9 @@
     <p:sldId id="271" r:id="rId17"/>
     <p:sldId id="272" r:id="rId18"/>
   </p:sldIdLst>
+  <p:notesMasterIdLst>
+    <p:notesMasterId r:id="rId19"/>
+  </p:notesMasterIdLst>
   <p:sldSz cx="12192000" cy="6858000"/>
   <p:notesSz cx="6858000" cy="12192000"/>
   <p:defaultTextStyle>
@@ -120,11 +120,6 @@
       </a:defRPr>
     </a:lvl9pPr>
   </p:defaultTextStyle>
-  <p:extLst>
-    <p:ext uri="{EFAFB233-063F-42B5-8137-9DF3F51BA10A}">
-      <p15:sldGuideLst xmlns:p15="http://schemas.microsoft.com/office/powerpoint/2012/main"/>
-    </p:ext>
-  </p:extLst>
 </p:presentation>
 </file>
 
@@ -150,10 +145,234 @@
           <a:chExt cx="0" cy="0"/>
         </a:xfrm>
       </p:grpSpPr>
+      <p:sp>
+        <p:nvSpPr>
+          <p:cNvPr id="2" name="Header Placeholder 1"/>
+          <p:cNvSpPr>
+            <a:spLocks noGrp="1"/>
+          </p:cNvSpPr>
+          <p:nvPr>
+            <p:ph type="hdr" sz="quarter"/>
+          </p:nvPr>
+        </p:nvSpPr>
+        <p:spPr>
+          <a:xfrm>
+            <a:off x="0" y="0"/>
+            <a:ext cx="2971800" cy="458788"/>
+          </a:xfrm>
+          <a:prstGeom prst="rect">
+            <a:avLst/>
+          </a:prstGeom>
+        </p:spPr>
+        <p:txBody>
+          <a:bodyPr vert="horz" lIns="91440" tIns="45720" rIns="91440" bIns="45720" rtlCol="0"/>
+          <a:lstStyle>
+            <a:lvl1pPr algn="l">
+              <a:defRPr sz="1200"/>
+            </a:lvl1pPr>
+          </a:lstStyle>
+          <a:p>
+            <a:endParaRPr lang="en-US"/>
+          </a:p>
+        </p:txBody>
+      </p:sp>
+      <p:sp>
+        <p:nvSpPr>
+          <p:cNvPr id="3" name="Date Placeholder 2"/>
+          <p:cNvSpPr>
+            <a:spLocks noGrp="1"/>
+          </p:cNvSpPr>
+          <p:nvPr>
+            <p:ph type="dt" idx="1"/>
+          </p:nvPr>
+        </p:nvSpPr>
+        <p:spPr>
+          <a:xfrm>
+            <a:off x="3884613" y="0"/>
+            <a:ext cx="2971800" cy="458788"/>
+          </a:xfrm>
+          <a:prstGeom prst="rect">
+            <a:avLst/>
+          </a:prstGeom>
+        </p:spPr>
+        <p:txBody>
+          <a:bodyPr vert="horz" lIns="91440" tIns="45720" rIns="91440" bIns="45720" rtlCol="0"/>
+          <a:lstStyle>
+            <a:lvl1pPr algn="r">
+              <a:defRPr sz="1200"/>
+            </a:lvl1pPr>
+          </a:lstStyle>
+          <a:p>
+            <a:fld id="{5282F153-3F37-0F45-9E97-73ACFA13230C}" type="datetimeFigureOut">
+              <a:rPr lang="en-US"/>
+              <a:t>7/23/19</a:t>
+            </a:fld>
+            <a:endParaRPr lang="en-US"/>
+          </a:p>
+        </p:txBody>
+      </p:sp>
+      <p:sp>
+        <p:nvSpPr>
+          <p:cNvPr id="4" name="Slide Image Placeholder 3"/>
+          <p:cNvSpPr>
+            <a:spLocks noGrp="1" noRot="1" noChangeAspect="1"/>
+          </p:cNvSpPr>
+          <p:nvPr>
+            <p:ph type="sldImg" idx="2"/>
+          </p:nvPr>
+        </p:nvSpPr>
+        <p:spPr>
+          <a:xfrm>
+            <a:off x="685800" y="1143000"/>
+            <a:ext cx="5486400" cy="3086100"/>
+          </a:xfrm>
+          <a:prstGeom prst="rect">
+            <a:avLst/>
+          </a:prstGeom>
+          <a:noFill/>
+          <a:ln w="12700">
+            <a:solidFill>
+              <a:prstClr val="black"/>
+            </a:solidFill>
+          </a:ln>
+        </p:spPr>
+        <p:txBody>
+          <a:bodyPr vert="horz" lIns="91440" tIns="45720" rIns="91440" bIns="45720" rtlCol="0" anchor="ctr"/>
+          <a:lstStyle/>
+          <a:p>
+            <a:endParaRPr lang="en-US"/>
+          </a:p>
+        </p:txBody>
+      </p:sp>
+      <p:sp>
+        <p:nvSpPr>
+          <p:cNvPr id="5" name="Notes Placeholder 4"/>
+          <p:cNvSpPr>
+            <a:spLocks noGrp="1"/>
+          </p:cNvSpPr>
+          <p:nvPr>
+            <p:ph type="body" sz="quarter" idx="3"/>
+          </p:nvPr>
+        </p:nvSpPr>
+        <p:spPr>
+          <a:xfrm>
+            <a:off x="685800" y="4400550"/>
+            <a:ext cx="5486400" cy="3600450"/>
+          </a:xfrm>
+          <a:prstGeom prst="rect">
+            <a:avLst/>
+          </a:prstGeom>
+        </p:spPr>
+        <p:txBody>
+          <a:bodyPr vert="horz" lIns="91440" tIns="45720" rIns="91440" bIns="45720" rtlCol="0"/>
+          <a:lstStyle/>
+          <a:p>
+            <a:pPr lvl="0"/>
+            <a:r>
+              <a:rPr lang="en-US"/>
+              <a:t>Click to edit Master text styles</a:t>
+            </a:r>
+          </a:p>
+          <a:p>
+            <a:pPr lvl="1"/>
+            <a:r>
+              <a:rPr lang="en-US"/>
+              <a:t>Second level</a:t>
+            </a:r>
+          </a:p>
+          <a:p>
+            <a:pPr lvl="2"/>
+            <a:r>
+              <a:rPr lang="en-US"/>
+              <a:t>Third level</a:t>
+            </a:r>
+          </a:p>
+          <a:p>
+            <a:pPr lvl="3"/>
+            <a:r>
+              <a:rPr lang="en-US"/>
+              <a:t>Fourth level</a:t>
+            </a:r>
+          </a:p>
+          <a:p>
+            <a:pPr lvl="4"/>
+            <a:r>
+              <a:rPr lang="en-US"/>
+              <a:t>Fifth level</a:t>
+            </a:r>
+          </a:p>
+        </p:txBody>
+      </p:sp>
+      <p:sp>
+        <p:nvSpPr>
+          <p:cNvPr id="6" name="Footer Placeholder 5"/>
+          <p:cNvSpPr>
+            <a:spLocks noGrp="1"/>
+          </p:cNvSpPr>
+          <p:nvPr>
+            <p:ph type="ftr" sz="quarter" idx="4"/>
+          </p:nvPr>
+        </p:nvSpPr>
+        <p:spPr>
+          <a:xfrm>
+            <a:off x="0" y="8685213"/>
+            <a:ext cx="2971800" cy="458787"/>
+          </a:xfrm>
+          <a:prstGeom prst="rect">
+            <a:avLst/>
+          </a:prstGeom>
+        </p:spPr>
+        <p:txBody>
+          <a:bodyPr vert="horz" lIns="91440" tIns="45720" rIns="91440" bIns="45720" rtlCol="0" anchor="b"/>
+          <a:lstStyle>
+            <a:lvl1pPr algn="l">
+              <a:defRPr sz="1200"/>
+            </a:lvl1pPr>
+          </a:lstStyle>
+          <a:p>
+            <a:endParaRPr lang="en-US"/>
+          </a:p>
+        </p:txBody>
+      </p:sp>
+      <p:sp>
+        <p:nvSpPr>
+          <p:cNvPr id="7" name="Slide Number Placeholder 6"/>
+          <p:cNvSpPr>
+            <a:spLocks noGrp="1"/>
+          </p:cNvSpPr>
+          <p:nvPr>
+            <p:ph type="sldNum" sz="quarter" idx="5"/>
+          </p:nvPr>
+        </p:nvSpPr>
+        <p:spPr>
+          <a:xfrm>
+            <a:off x="3884613" y="8685213"/>
+            <a:ext cx="2971800" cy="458787"/>
+          </a:xfrm>
+          <a:prstGeom prst="rect">
+            <a:avLst/>
+          </a:prstGeom>
+        </p:spPr>
+        <p:txBody>
+          <a:bodyPr vert="horz" lIns="91440" tIns="45720" rIns="91440" bIns="45720" rtlCol="0" anchor="b"/>
+          <a:lstStyle>
+            <a:lvl1pPr algn="r">
+              <a:defRPr sz="1200"/>
+            </a:lvl1pPr>
+          </a:lstStyle>
+          <a:p>
+            <a:fld id="{CE5E9CC1-C706-0F49-92D6-E571CC5EEA8F}" type="slidenum">
+              <a:rPr lang="en-US"/>
+              <a:t>‹#›</a:t>
+            </a:fld>
+            <a:endParaRPr lang="en-US"/>
+          </a:p>
+        </p:txBody>
+      </p:sp>
     </p:spTree>
     <p:extLst>
       <p:ext uri="{BB962C8B-B14F-4D97-AF65-F5344CB8AC3E}">
-        <p14:creationId xmlns:p14="http://schemas.microsoft.com/office/powerpoint/2010/main" val="4263051767"/>
+        <p14:creationId xmlns:p14="http://schemas.microsoft.com/office/powerpoint/2010/main" val="1024086991"/>
       </p:ext>
     </p:extLst>
   </p:cSld>
@@ -297,6 +516,10 @@
           <a:bodyPr/>
           <a:lstStyle/>
           <a:p>
+            <a:r>
+              <a:rPr lang="en-US" dirty="0"/>
+              <a:t/>
+            </a:r>
             <a:endParaRPr lang="en-US" dirty="0"/>
           </a:p>
         </p:txBody>
@@ -381,6 +604,10 @@
           <a:bodyPr/>
           <a:lstStyle/>
           <a:p>
+            <a:r>
+              <a:rPr lang="en-US" dirty="0"/>
+              <a:t/>
+            </a:r>
             <a:endParaRPr lang="en-US" dirty="0"/>
           </a:p>
         </p:txBody>
@@ -465,6 +692,10 @@
           <a:bodyPr/>
           <a:lstStyle/>
           <a:p>
+            <a:r>
+              <a:rPr lang="en-US" dirty="0"/>
+              <a:t/>
+            </a:r>
             <a:endParaRPr lang="en-US" dirty="0"/>
           </a:p>
         </p:txBody>
@@ -549,6 +780,10 @@
           <a:bodyPr/>
           <a:lstStyle/>
           <a:p>
+            <a:r>
+              <a:rPr lang="en-US" dirty="0"/>
+              <a:t/>
+            </a:r>
             <a:endParaRPr lang="en-US" dirty="0"/>
           </a:p>
         </p:txBody>
@@ -633,6 +868,10 @@
           <a:bodyPr/>
           <a:lstStyle/>
           <a:p>
+            <a:r>
+              <a:rPr lang="en-US" dirty="0"/>
+              <a:t/>
+            </a:r>
             <a:endParaRPr lang="en-US" dirty="0"/>
           </a:p>
         </p:txBody>
@@ -717,6 +956,10 @@
           <a:bodyPr/>
           <a:lstStyle/>
           <a:p>
+            <a:r>
+              <a:rPr lang="en-US" dirty="0"/>
+              <a:t/>
+            </a:r>
             <a:endParaRPr lang="en-US" dirty="0"/>
           </a:p>
         </p:txBody>
@@ -801,6 +1044,10 @@
           <a:bodyPr/>
           <a:lstStyle/>
           <a:p>
+            <a:r>
+              <a:rPr lang="en-US" dirty="0"/>
+              <a:t/>
+            </a:r>
             <a:endParaRPr lang="en-US" dirty="0"/>
           </a:p>
         </p:txBody>
@@ -885,6 +1132,10 @@
           <a:bodyPr/>
           <a:lstStyle/>
           <a:p>
+            <a:r>
+              <a:rPr lang="en-US" dirty="0"/>
+              <a:t/>
+            </a:r>
             <a:endParaRPr lang="en-US" dirty="0"/>
           </a:p>
         </p:txBody>
@@ -969,6 +1220,10 @@
           <a:bodyPr/>
           <a:lstStyle/>
           <a:p>
+            <a:r>
+              <a:rPr lang="en-US" dirty="0"/>
+              <a:t/>
+            </a:r>
             <a:endParaRPr lang="en-US" dirty="0"/>
           </a:p>
         </p:txBody>
@@ -1053,6 +1308,10 @@
           <a:bodyPr/>
           <a:lstStyle/>
           <a:p>
+            <a:r>
+              <a:rPr lang="en-US" dirty="0"/>
+              <a:t/>
+            </a:r>
             <a:endParaRPr lang="en-US" dirty="0"/>
           </a:p>
         </p:txBody>
@@ -1137,6 +1396,10 @@
           <a:bodyPr/>
           <a:lstStyle/>
           <a:p>
+            <a:r>
+              <a:rPr lang="en-US" dirty="0"/>
+              <a:t/>
+            </a:r>
             <a:endParaRPr lang="en-US" dirty="0"/>
           </a:p>
         </p:txBody>
@@ -1221,6 +1484,10 @@
           <a:bodyPr/>
           <a:lstStyle/>
           <a:p>
+            <a:r>
+              <a:rPr lang="en-US" dirty="0"/>
+              <a:t/>
+            </a:r>
             <a:endParaRPr lang="en-US" dirty="0"/>
           </a:p>
         </p:txBody>
@@ -1305,6 +1572,10 @@
           <a:bodyPr/>
           <a:lstStyle/>
           <a:p>
+            <a:r>
+              <a:rPr lang="en-US" dirty="0"/>
+              <a:t/>
+            </a:r>
             <a:endParaRPr lang="en-US" dirty="0"/>
           </a:p>
         </p:txBody>
@@ -1389,6 +1660,10 @@
           <a:bodyPr/>
           <a:lstStyle/>
           <a:p>
+            <a:r>
+              <a:rPr lang="en-US" dirty="0"/>
+              <a:t/>
+            </a:r>
             <a:endParaRPr lang="en-US" dirty="0"/>
           </a:p>
         </p:txBody>
@@ -1473,6 +1748,10 @@
           <a:bodyPr/>
           <a:lstStyle/>
           <a:p>
+            <a:r>
+              <a:rPr lang="en-US" dirty="0"/>
+              <a:t/>
+            </a:r>
             <a:endParaRPr lang="en-US" dirty="0"/>
           </a:p>
         </p:txBody>
@@ -1557,6 +1836,10 @@
           <a:bodyPr/>
           <a:lstStyle/>
           <a:p>
+            <a:r>
+              <a:rPr lang="en-US" dirty="0"/>
+              <a:t/>
+            </a:r>
             <a:endParaRPr lang="en-US" dirty="0"/>
           </a:p>
         </p:txBody>
@@ -1641,6 +1924,10 @@
           <a:bodyPr/>
           <a:lstStyle/>
           <a:p>
+            <a:r>
+              <a:rPr lang="en-US" dirty="0"/>
+              <a:t/>
+            </a:r>
             <a:endParaRPr lang="en-US" dirty="0"/>
           </a:p>
         </p:txBody>
@@ -1714,11 +2001,6 @@
 <file path=ppt/slideMasters/slideMaster1.xml><?xml version="1.0" encoding="utf-8"?>
 <p:sldMaster xmlns:a="http://schemas.openxmlformats.org/drawingml/2006/main" xmlns:r="http://schemas.openxmlformats.org/officeDocument/2006/relationships" xmlns:p="http://schemas.openxmlformats.org/presentationml/2006/main">
   <p:cSld>
-    <p:bg>
-      <p:bgRef idx="1001">
-        <a:schemeClr val="bg1"/>
-      </p:bgRef>
-    </p:bg>
     <p:spTree>
       <p:nvGrpSpPr>
         <p:cNvPr id="1" name=""/>
@@ -2001,7 +2283,6 @@
         <a:solidFill>
           <a:srgbClr val="030733"/>
         </a:solidFill>
-        <a:effectLst/>
       </p:bgPr>
     </p:bg>
     <p:spTree>
@@ -2061,13 +2342,6 @@
           </a:solidFill>
           <a:ln/>
         </p:spPr>
-        <p:txBody>
-          <a:bodyPr/>
-          <a:lstStyle/>
-          <a:p>
-            <a:endParaRPr lang="en-IN" dirty="0"/>
-          </a:p>
-        </p:txBody>
       </p:sp>
       <p:sp>
         <p:nvSpPr>
@@ -2090,7 +2364,7 @@
           <a:bodyPr wrap="square" lIns="0" tIns="0" rIns="0" bIns="0" rtlCol="0" anchor="ctr"/>
           <a:lstStyle/>
           <a:p>
-            <a:pPr marL="0" indent="0">
+            <a:pPr indent="0" marL="0">
               <a:buNone/>
             </a:pPr>
             <a:r>
@@ -2129,7 +2403,7 @@
           <a:bodyPr wrap="square" lIns="0" tIns="0" rIns="0" bIns="0" rtlCol="0" anchor="ctr"/>
           <a:lstStyle/>
           <a:p>
-            <a:pPr marL="0" indent="0">
+            <a:pPr indent="0" marL="0">
               <a:buNone/>
             </a:pPr>
             <a:r>
@@ -2156,7 +2430,7 @@
         <p:spPr>
           <a:xfrm>
             <a:off x="795528" y="4114800"/>
-            <a:ext cx="5946916" cy="45720"/>
+            <a:ext cx="502920" cy="41148"/>
           </a:xfrm>
           <a:prstGeom prst="rect">
             <a:avLst/>
@@ -2188,7 +2462,7 @@
           <a:bodyPr wrap="square" lIns="0" tIns="0" rIns="0" bIns="0" rtlCol="0" anchor="ctr"/>
           <a:lstStyle/>
           <a:p>
-            <a:pPr marL="0" indent="0">
+            <a:pPr indent="0" marL="0">
               <a:buNone/>
             </a:pPr>
             <a:r>
@@ -2227,7 +2501,7 @@
           <a:bodyPr wrap="square" lIns="0" tIns="0" rIns="0" bIns="0" rtlCol="0" anchor="ctr"/>
           <a:lstStyle/>
           <a:p>
-            <a:pPr marL="0" indent="0">
+            <a:pPr indent="0" marL="0">
               <a:buNone/>
             </a:pPr>
             <a:r>
@@ -2266,7 +2540,7 @@
           <a:bodyPr wrap="square" lIns="0" tIns="0" rIns="0" bIns="0" rtlCol="0" anchor="ctr"/>
           <a:lstStyle/>
           <a:p>
-            <a:pPr marL="0" indent="0">
+            <a:pPr indent="0" marL="0">
               <a:buNone/>
             </a:pPr>
             <a:r>
@@ -2278,18 +2552,7 @@
                 <a:ea typeface="Arial" pitchFamily="34" charset="-122"/>
                 <a:cs typeface="Arial" pitchFamily="34" charset="-120"/>
               </a:rPr>
-              <a:t>Presented by Varun Kumar </a:t>
-            </a:r>
-            <a:r>
-              <a:rPr lang="en-US" sz="1300" b="1" dirty="0" err="1">
-                <a:solidFill>
-                  <a:srgbClr val="FFFFFF"/>
-                </a:solidFill>
-                <a:latin typeface="Arial" pitchFamily="34" charset="0"/>
-                <a:ea typeface="Arial" pitchFamily="34" charset="-122"/>
-                <a:cs typeface="Arial" pitchFamily="34" charset="-120"/>
-              </a:rPr>
-              <a:t>Kesineni</a:t>
+              <a:t>Presented by Varun</a:t>
             </a:r>
             <a:endParaRPr lang="en-US" sz="1300" dirty="0"/>
           </a:p>
@@ -2311,7 +2574,6 @@
         <a:solidFill>
           <a:srgbClr val="030733"/>
         </a:solidFill>
-        <a:effectLst/>
       </p:bgPr>
     </p:bg>
     <p:spTree>
@@ -2349,11 +2611,11 @@
           <a:bodyPr wrap="square" lIns="0" tIns="0" rIns="0" bIns="0" rtlCol="0" anchor="ctr"/>
           <a:lstStyle/>
           <a:p>
-            <a:pPr marL="0" indent="0">
-              <a:buNone/>
-            </a:pPr>
-            <a:r>
-              <a:rPr lang="en-US" sz="1200" b="1" kern="0" spc="200" dirty="0">
+            <a:pPr indent="0" marL="0">
+              <a:buNone/>
+            </a:pPr>
+            <a:r>
+              <a:rPr lang="en-US" sz="1200" b="1" spc="200" kern="0" dirty="0">
                 <a:solidFill>
                   <a:srgbClr val="2BCA81"/>
                 </a:solidFill>
@@ -2388,7 +2650,7 @@
           <a:bodyPr wrap="square" lIns="0" tIns="0" rIns="0" bIns="0" rtlCol="0" anchor="ctr"/>
           <a:lstStyle/>
           <a:p>
-            <a:pPr marL="0" indent="0">
+            <a:pPr indent="0" marL="0">
               <a:buNone/>
             </a:pPr>
             <a:r>
@@ -2435,14 +2697,14 @@
       </p:sp>
       <p:pic>
         <p:nvPicPr>
-          <p:cNvPr id="5" name="Image 0" descr="assets/Research_Analytics.png"/>
+          <p:cNvPr id="5" name="Image 0" descr="assets/Research_Analytics.png">    </p:cNvPr>
           <p:cNvPicPr>
             <a:picLocks noChangeAspect="1"/>
           </p:cNvPicPr>
           <p:nvPr/>
         </p:nvPicPr>
         <p:blipFill>
-          <a:blip r:embed="rId3"/>
+          <a:blip r:embed="rId1"/>
           <a:stretch>
             <a:fillRect/>
           </a:stretch>
@@ -2478,7 +2740,7 @@
           <a:bodyPr wrap="square" lIns="0" tIns="0" rIns="0" bIns="0" rtlCol="0" anchor="ctr"/>
           <a:lstStyle/>
           <a:p>
-            <a:pPr marL="0" indent="0">
+            <a:pPr indent="0" marL="0">
               <a:buNone/>
             </a:pPr>
             <a:r>
@@ -2623,7 +2885,7 @@
           <a:bodyPr wrap="square" lIns="0" tIns="0" rIns="0" bIns="0" rtlCol="0" anchor="ctr"/>
           <a:lstStyle/>
           <a:p>
-            <a:pPr marL="0" indent="0">
+            <a:pPr indent="0" marL="0">
               <a:buNone/>
             </a:pPr>
             <a:r>
@@ -2662,9 +2924,20 @@
           <a:bodyPr wrap="square" lIns="0" tIns="0" rIns="0" bIns="0" rtlCol="0" anchor="ctr"/>
           <a:lstStyle/>
           <a:p>
-            <a:pPr marL="0" indent="0" algn="l">
-              <a:buNone/>
-            </a:pPr>
+            <a:pPr algn="l" indent="0" marL="0">
+              <a:buNone/>
+            </a:pPr>
+            <a:r>
+              <a:rPr lang="en-US" sz="900" dirty="0">
+                <a:solidFill>
+                  <a:srgbClr val="B0AFD3"/>
+                </a:solidFill>
+                <a:latin typeface="Arial" pitchFamily="34" charset="0"/>
+                <a:ea typeface="Arial" pitchFamily="34" charset="-122"/>
+                <a:cs typeface="Arial" pitchFamily="34" charset="-120"/>
+              </a:rPr>
+              <a:t>EduVision</a:t>
+            </a:r>
             <a:endParaRPr lang="en-US" sz="900" dirty="0"/>
           </a:p>
         </p:txBody>
@@ -2690,7 +2963,7 @@
           <a:bodyPr wrap="square" lIns="0" tIns="0" rIns="0" bIns="0" rtlCol="0" anchor="ctr"/>
           <a:lstStyle/>
           <a:p>
-            <a:pPr marL="0" indent="0" algn="r">
+            <a:pPr algn="r" indent="0" marL="0">
               <a:buNone/>
             </a:pPr>
             <a:r>
@@ -2724,7 +2997,6 @@
         <a:solidFill>
           <a:srgbClr val="030733"/>
         </a:solidFill>
-        <a:effectLst/>
       </p:bgPr>
     </p:bg>
     <p:spTree>
@@ -2762,11 +3034,11 @@
           <a:bodyPr wrap="square" lIns="0" tIns="0" rIns="0" bIns="0" rtlCol="0" anchor="ctr"/>
           <a:lstStyle/>
           <a:p>
-            <a:pPr marL="0" indent="0">
-              <a:buNone/>
-            </a:pPr>
-            <a:r>
-              <a:rPr lang="en-US" sz="1200" b="1" kern="0" spc="200" dirty="0">
+            <a:pPr indent="0" marL="0">
+              <a:buNone/>
+            </a:pPr>
+            <a:r>
+              <a:rPr lang="en-US" sz="1200" b="1" spc="200" kern="0" dirty="0">
                 <a:solidFill>
                   <a:srgbClr val="2BCA81"/>
                 </a:solidFill>
@@ -2801,7 +3073,7 @@
           <a:bodyPr wrap="square" lIns="0" tIns="0" rIns="0" bIns="0" rtlCol="0" anchor="ctr"/>
           <a:lstStyle/>
           <a:p>
-            <a:pPr marL="0" indent="0">
+            <a:pPr indent="0" marL="0">
               <a:buNone/>
             </a:pPr>
             <a:r>
@@ -2848,14 +3120,14 @@
       </p:sp>
       <p:pic>
         <p:nvPicPr>
-          <p:cNvPr id="5" name="Image 0" descr="assets/Student_Analytics.png"/>
+          <p:cNvPr id="5" name="Image 0" descr="assets/Student_Analytics.png">    </p:cNvPr>
           <p:cNvPicPr>
             <a:picLocks noChangeAspect="1"/>
           </p:cNvPicPr>
           <p:nvPr/>
         </p:nvPicPr>
         <p:blipFill>
-          <a:blip r:embed="rId3"/>
+          <a:blip r:embed="rId1"/>
           <a:stretch>
             <a:fillRect/>
           </a:stretch>
@@ -2891,7 +3163,7 @@
           <a:bodyPr wrap="square" lIns="0" tIns="0" rIns="0" bIns="0" rtlCol="0" anchor="ctr"/>
           <a:lstStyle/>
           <a:p>
-            <a:pPr marL="0" indent="0">
+            <a:pPr indent="0" marL="0">
               <a:buNone/>
             </a:pPr>
             <a:r>
@@ -3036,7 +3308,7 @@
           <a:bodyPr wrap="square" lIns="0" tIns="0" rIns="0" bIns="0" rtlCol="0" anchor="ctr"/>
           <a:lstStyle/>
           <a:p>
-            <a:pPr marL="0" indent="0">
+            <a:pPr indent="0" marL="0">
               <a:buNone/>
             </a:pPr>
             <a:r>
@@ -3051,6 +3323,45 @@
               <a:t>Actual Tableau dashboard from the completed EduVision project.</a:t>
             </a:r>
             <a:endParaRPr lang="en-US" sz="950" dirty="0"/>
+          </a:p>
+        </p:txBody>
+      </p:sp>
+      <p:sp>
+        <p:nvSpPr>
+          <p:cNvPr id="9" name="Text 6"/>
+          <p:cNvSpPr/>
+          <p:nvPr/>
+        </p:nvSpPr>
+        <p:spPr>
+          <a:xfrm>
+            <a:off x="457200" y="6537960"/>
+            <a:ext cx="5486400" cy="274320"/>
+          </a:xfrm>
+          <a:prstGeom prst="rect">
+            <a:avLst/>
+          </a:prstGeom>
+          <a:noFill/>
+          <a:ln/>
+        </p:spPr>
+        <p:txBody>
+          <a:bodyPr wrap="square" lIns="0" tIns="0" rIns="0" bIns="0" rtlCol="0" anchor="ctr"/>
+          <a:lstStyle/>
+          <a:p>
+            <a:pPr algn="l" indent="0" marL="0">
+              <a:buNone/>
+            </a:pPr>
+            <a:r>
+              <a:rPr lang="en-US" sz="900" dirty="0">
+                <a:solidFill>
+                  <a:srgbClr val="B0AFD3"/>
+                </a:solidFill>
+                <a:latin typeface="Arial" pitchFamily="34" charset="0"/>
+                <a:ea typeface="Arial" pitchFamily="34" charset="-122"/>
+                <a:cs typeface="Arial" pitchFamily="34" charset="-120"/>
+              </a:rPr>
+              <a:t>EduVision</a:t>
+            </a:r>
+            <a:endParaRPr lang="en-US" sz="900" dirty="0"/>
           </a:p>
         </p:txBody>
       </p:sp>
@@ -3075,7 +3386,7 @@
           <a:bodyPr wrap="square" lIns="0" tIns="0" rIns="0" bIns="0" rtlCol="0" anchor="ctr"/>
           <a:lstStyle/>
           <a:p>
-            <a:pPr marL="0" indent="0" algn="r">
+            <a:pPr algn="r" indent="0" marL="0">
               <a:buNone/>
             </a:pPr>
             <a:r>
@@ -3109,7 +3420,6 @@
         <a:solidFill>
           <a:srgbClr val="030733"/>
         </a:solidFill>
-        <a:effectLst/>
       </p:bgPr>
     </p:bg>
     <p:spTree>
@@ -3147,11 +3457,11 @@
           <a:bodyPr wrap="square" lIns="0" tIns="0" rIns="0" bIns="0" rtlCol="0" anchor="ctr"/>
           <a:lstStyle/>
           <a:p>
-            <a:pPr marL="0" indent="0">
-              <a:buNone/>
-            </a:pPr>
-            <a:r>
-              <a:rPr lang="en-US" sz="1200" b="1" kern="0" spc="200" dirty="0">
+            <a:pPr indent="0" marL="0">
+              <a:buNone/>
+            </a:pPr>
+            <a:r>
+              <a:rPr lang="en-US" sz="1200" b="1" spc="200" kern="0" dirty="0">
                 <a:solidFill>
                   <a:srgbClr val="2BCA81"/>
                 </a:solidFill>
@@ -3186,7 +3496,7 @@
           <a:bodyPr wrap="square" lIns="0" tIns="0" rIns="0" bIns="0" rtlCol="0" anchor="ctr"/>
           <a:lstStyle/>
           <a:p>
-            <a:pPr marL="0" indent="0">
+            <a:pPr indent="0" marL="0">
               <a:buNone/>
             </a:pPr>
             <a:r>
@@ -3233,14 +3543,14 @@
       </p:sp>
       <p:pic>
         <p:nvPicPr>
-          <p:cNvPr id="5" name="Image 0" descr="assets/Country_Comparison.png"/>
+          <p:cNvPr id="5" name="Image 0" descr="assets/Country_Comparison.png">    </p:cNvPr>
           <p:cNvPicPr>
             <a:picLocks noChangeAspect="1"/>
           </p:cNvPicPr>
           <p:nvPr/>
         </p:nvPicPr>
         <p:blipFill>
-          <a:blip r:embed="rId3"/>
+          <a:blip r:embed="rId1"/>
           <a:stretch>
             <a:fillRect/>
           </a:stretch>
@@ -3276,7 +3586,7 @@
           <a:bodyPr wrap="square" lIns="0" tIns="0" rIns="0" bIns="0" rtlCol="0" anchor="ctr"/>
           <a:lstStyle/>
           <a:p>
-            <a:pPr marL="0" indent="0">
+            <a:pPr indent="0" marL="0">
               <a:buNone/>
             </a:pPr>
             <a:r>
@@ -3421,7 +3731,7 @@
           <a:bodyPr wrap="square" lIns="0" tIns="0" rIns="0" bIns="0" rtlCol="0" anchor="ctr"/>
           <a:lstStyle/>
           <a:p>
-            <a:pPr marL="0" indent="0">
+            <a:pPr indent="0" marL="0">
               <a:buNone/>
             </a:pPr>
             <a:r>
@@ -3460,9 +3770,20 @@
           <a:bodyPr wrap="square" lIns="0" tIns="0" rIns="0" bIns="0" rtlCol="0" anchor="ctr"/>
           <a:lstStyle/>
           <a:p>
-            <a:pPr marL="0" indent="0" algn="l">
-              <a:buNone/>
-            </a:pPr>
+            <a:pPr algn="l" indent="0" marL="0">
+              <a:buNone/>
+            </a:pPr>
+            <a:r>
+              <a:rPr lang="en-US" sz="900" dirty="0">
+                <a:solidFill>
+                  <a:srgbClr val="B0AFD3"/>
+                </a:solidFill>
+                <a:latin typeface="Arial" pitchFamily="34" charset="0"/>
+                <a:ea typeface="Arial" pitchFamily="34" charset="-122"/>
+                <a:cs typeface="Arial" pitchFamily="34" charset="-120"/>
+              </a:rPr>
+              <a:t>EduVision</a:t>
+            </a:r>
             <a:endParaRPr lang="en-US" sz="900" dirty="0"/>
           </a:p>
         </p:txBody>
@@ -3488,7 +3809,7 @@
           <a:bodyPr wrap="square" lIns="0" tIns="0" rIns="0" bIns="0" rtlCol="0" anchor="ctr"/>
           <a:lstStyle/>
           <a:p>
-            <a:pPr marL="0" indent="0" algn="r">
+            <a:pPr algn="r" indent="0" marL="0">
               <a:buNone/>
             </a:pPr>
             <a:r>
@@ -3522,7 +3843,6 @@
         <a:solidFill>
           <a:srgbClr val="1A1F4A"/>
         </a:solidFill>
-        <a:effectLst/>
       </p:bgPr>
     </p:bg>
     <p:spTree>
@@ -3582,13 +3902,6 @@
           </a:solidFill>
           <a:ln/>
         </p:spPr>
-        <p:txBody>
-          <a:bodyPr/>
-          <a:lstStyle/>
-          <a:p>
-            <a:endParaRPr lang="en-IN" dirty="0"/>
-          </a:p>
-        </p:txBody>
       </p:sp>
       <p:sp>
         <p:nvSpPr>
@@ -3611,11 +3924,11 @@
           <a:bodyPr wrap="square" lIns="0" tIns="0" rIns="0" bIns="0" rtlCol="0" anchor="ctr"/>
           <a:lstStyle/>
           <a:p>
-            <a:pPr marL="0" indent="0">
-              <a:buNone/>
-            </a:pPr>
-            <a:r>
-              <a:rPr lang="en-US" sz="1200" b="1" kern="0" spc="200" dirty="0">
+            <a:pPr indent="0" marL="0">
+              <a:buNone/>
+            </a:pPr>
+            <a:r>
+              <a:rPr lang="en-US" sz="1200" b="1" spc="200" kern="0" dirty="0">
                 <a:solidFill>
                   <a:srgbClr val="2BCA81"/>
                 </a:solidFill>
@@ -3650,7 +3963,7 @@
           <a:bodyPr wrap="square" lIns="0" tIns="0" rIns="0" bIns="0" rtlCol="0" anchor="ctr"/>
           <a:lstStyle/>
           <a:p>
-            <a:pPr marL="0" indent="0">
+            <a:pPr indent="0" marL="0">
               <a:buNone/>
             </a:pPr>
             <a:r>
@@ -3689,7 +4002,7 @@
           </a:solidFill>
           <a:ln/>
           <a:effectLst>
-            <a:outerShdw blurRad="101600" dist="38100" dir="5400000" algn="bl" rotWithShape="0">
+            <a:outerShdw sx="100000" sy="100000" kx="0" ky="0" algn="bl" rotWithShape="0" blurRad="101600" dist="38100" dir="5400000">
               <a:srgbClr val="000000">
                 <a:alpha val="35000"/>
               </a:srgbClr>
@@ -3738,7 +4051,7 @@
           <a:bodyPr wrap="square" lIns="0" tIns="0" rIns="0" bIns="0" rtlCol="0" anchor="ctr"/>
           <a:lstStyle/>
           <a:p>
-            <a:pPr marL="0" indent="0" algn="ctr">
+            <a:pPr algn="ctr" indent="0" marL="0">
               <a:buNone/>
             </a:pPr>
             <a:r>
@@ -3777,7 +4090,7 @@
           <a:bodyPr wrap="square" lIns="0" tIns="0" rIns="0" bIns="0" rtlCol="0" anchor="ctr"/>
           <a:lstStyle/>
           <a:p>
-            <a:pPr marL="0" indent="0">
+            <a:pPr indent="0" marL="0">
               <a:buNone/>
             </a:pPr>
             <a:r>
@@ -3816,7 +4129,7 @@
           <a:bodyPr wrap="square" lIns="0" tIns="0" rIns="0" bIns="0" rtlCol="0" anchor="ctr"/>
           <a:lstStyle/>
           <a:p>
-            <a:pPr marL="0" indent="0">
+            <a:pPr indent="0" marL="0">
               <a:lnSpc>
                 <a:spcPct val="120000"/>
               </a:lnSpc>
@@ -3858,7 +4171,7 @@
           </a:solidFill>
           <a:ln/>
           <a:effectLst>
-            <a:outerShdw blurRad="101600" dist="38100" dir="5400000" algn="bl" rotWithShape="0">
+            <a:outerShdw sx="100000" sy="100000" kx="0" ky="0" algn="bl" rotWithShape="0" blurRad="101600" dist="38100" dir="5400000">
               <a:srgbClr val="000000">
                 <a:alpha val="35000"/>
               </a:srgbClr>
@@ -3907,7 +4220,7 @@
           <a:bodyPr wrap="square" lIns="0" tIns="0" rIns="0" bIns="0" rtlCol="0" anchor="ctr"/>
           <a:lstStyle/>
           <a:p>
-            <a:pPr marL="0" indent="0" algn="ctr">
+            <a:pPr algn="ctr" indent="0" marL="0">
               <a:buNone/>
             </a:pPr>
             <a:r>
@@ -3946,7 +4259,7 @@
           <a:bodyPr wrap="square" lIns="0" tIns="0" rIns="0" bIns="0" rtlCol="0" anchor="ctr"/>
           <a:lstStyle/>
           <a:p>
-            <a:pPr marL="0" indent="0">
+            <a:pPr indent="0" marL="0">
               <a:buNone/>
             </a:pPr>
             <a:r>
@@ -3985,7 +4298,7 @@
           <a:bodyPr wrap="square" lIns="0" tIns="0" rIns="0" bIns="0" rtlCol="0" anchor="ctr"/>
           <a:lstStyle/>
           <a:p>
-            <a:pPr marL="0" indent="0">
+            <a:pPr indent="0" marL="0">
               <a:lnSpc>
                 <a:spcPct val="120000"/>
               </a:lnSpc>
@@ -4027,7 +4340,7 @@
           </a:solidFill>
           <a:ln/>
           <a:effectLst>
-            <a:outerShdw blurRad="101600" dist="38100" dir="5400000" algn="bl" rotWithShape="0">
+            <a:outerShdw sx="100000" sy="100000" kx="0" ky="0" algn="bl" rotWithShape="0" blurRad="101600" dist="38100" dir="5400000">
               <a:srgbClr val="000000">
                 <a:alpha val="35000"/>
               </a:srgbClr>
@@ -4076,7 +4389,7 @@
           <a:bodyPr wrap="square" lIns="0" tIns="0" rIns="0" bIns="0" rtlCol="0" anchor="ctr"/>
           <a:lstStyle/>
           <a:p>
-            <a:pPr marL="0" indent="0" algn="ctr">
+            <a:pPr algn="ctr" indent="0" marL="0">
               <a:buNone/>
             </a:pPr>
             <a:r>
@@ -4115,7 +4428,7 @@
           <a:bodyPr wrap="square" lIns="0" tIns="0" rIns="0" bIns="0" rtlCol="0" anchor="ctr"/>
           <a:lstStyle/>
           <a:p>
-            <a:pPr marL="0" indent="0">
+            <a:pPr indent="0" marL="0">
               <a:buNone/>
             </a:pPr>
             <a:r>
@@ -4154,7 +4467,7 @@
           <a:bodyPr wrap="square" lIns="0" tIns="0" rIns="0" bIns="0" rtlCol="0" anchor="ctr"/>
           <a:lstStyle/>
           <a:p>
-            <a:pPr marL="0" indent="0">
+            <a:pPr indent="0" marL="0">
               <a:lnSpc>
                 <a:spcPct val="120000"/>
               </a:lnSpc>
@@ -4177,6 +4490,45 @@
       </p:sp>
       <p:sp>
         <p:nvSpPr>
+          <p:cNvPr id="21" name="Text 19"/>
+          <p:cNvSpPr/>
+          <p:nvPr/>
+        </p:nvSpPr>
+        <p:spPr>
+          <a:xfrm>
+            <a:off x="457200" y="6537960"/>
+            <a:ext cx="5486400" cy="274320"/>
+          </a:xfrm>
+          <a:prstGeom prst="rect">
+            <a:avLst/>
+          </a:prstGeom>
+          <a:noFill/>
+          <a:ln/>
+        </p:spPr>
+        <p:txBody>
+          <a:bodyPr wrap="square" lIns="0" tIns="0" rIns="0" bIns="0" rtlCol="0" anchor="ctr"/>
+          <a:lstStyle/>
+          <a:p>
+            <a:pPr algn="l" indent="0" marL="0">
+              <a:buNone/>
+            </a:pPr>
+            <a:r>
+              <a:rPr lang="en-US" sz="900" dirty="0">
+                <a:solidFill>
+                  <a:srgbClr val="B0AFD3"/>
+                </a:solidFill>
+                <a:latin typeface="Arial" pitchFamily="34" charset="0"/>
+                <a:ea typeface="Arial" pitchFamily="34" charset="-122"/>
+                <a:cs typeface="Arial" pitchFamily="34" charset="-120"/>
+              </a:rPr>
+              <a:t>EduVision</a:t>
+            </a:r>
+            <a:endParaRPr lang="en-US" sz="900" dirty="0"/>
+          </a:p>
+        </p:txBody>
+      </p:sp>
+      <p:sp>
+        <p:nvSpPr>
           <p:cNvPr id="22" name="Text 20"/>
           <p:cNvSpPr/>
           <p:nvPr/>
@@ -4196,7 +4548,7 @@
           <a:bodyPr wrap="square" lIns="0" tIns="0" rIns="0" bIns="0" rtlCol="0" anchor="ctr"/>
           <a:lstStyle/>
           <a:p>
-            <a:pPr marL="0" indent="0" algn="r">
+            <a:pPr algn="r" indent="0" marL="0">
               <a:buNone/>
             </a:pPr>
             <a:r>
@@ -4230,7 +4582,6 @@
         <a:solidFill>
           <a:srgbClr val="030733"/>
         </a:solidFill>
-        <a:effectLst/>
       </p:bgPr>
     </p:bg>
     <p:spTree>
@@ -4290,13 +4641,6 @@
           </a:solidFill>
           <a:ln/>
         </p:spPr>
-        <p:txBody>
-          <a:bodyPr/>
-          <a:lstStyle/>
-          <a:p>
-            <a:endParaRPr lang="en-IN" dirty="0"/>
-          </a:p>
-        </p:txBody>
       </p:sp>
       <p:sp>
         <p:nvSpPr>
@@ -4319,11 +4663,11 @@
           <a:bodyPr wrap="square" lIns="0" tIns="0" rIns="0" bIns="0" rtlCol="0" anchor="ctr"/>
           <a:lstStyle/>
           <a:p>
-            <a:pPr marL="0" indent="0">
-              <a:buNone/>
-            </a:pPr>
-            <a:r>
-              <a:rPr lang="en-US" sz="1200" b="1" kern="0" spc="200" dirty="0">
+            <a:pPr indent="0" marL="0">
+              <a:buNone/>
+            </a:pPr>
+            <a:r>
+              <a:rPr lang="en-US" sz="1200" b="1" spc="200" kern="0" dirty="0">
                 <a:solidFill>
                   <a:srgbClr val="2BCA81"/>
                 </a:solidFill>
@@ -4358,7 +4702,7 @@
           <a:bodyPr wrap="square" lIns="0" tIns="0" rIns="0" bIns="0" rtlCol="0" anchor="ctr"/>
           <a:lstStyle/>
           <a:p>
-            <a:pPr marL="0" indent="0">
+            <a:pPr indent="0" marL="0">
               <a:buNone/>
             </a:pPr>
             <a:r>
@@ -4397,7 +4741,7 @@
           </a:solidFill>
           <a:ln/>
           <a:effectLst>
-            <a:outerShdw blurRad="101600" dist="38100" dir="5400000" algn="bl" rotWithShape="0">
+            <a:outerShdw sx="100000" sy="100000" kx="0" ky="0" algn="bl" rotWithShape="0" blurRad="101600" dist="38100" dir="5400000">
               <a:srgbClr val="000000">
                 <a:alpha val="35000"/>
               </a:srgbClr>
@@ -4426,7 +4770,7 @@
           <a:bodyPr wrap="square" lIns="0" tIns="0" rIns="0" bIns="0" rtlCol="0" anchor="ctr"/>
           <a:lstStyle/>
           <a:p>
-            <a:pPr marL="0" indent="0">
+            <a:pPr indent="0" marL="0">
               <a:buNone/>
             </a:pPr>
             <a:r>
@@ -4465,7 +4809,7 @@
           <a:bodyPr wrap="square" lIns="0" tIns="0" rIns="0" bIns="0" rtlCol="0" anchor="ctr"/>
           <a:lstStyle/>
           <a:p>
-            <a:pPr marL="0" indent="0">
+            <a:pPr indent="0" marL="0">
               <a:spcAft>
                 <a:spcPts val="600"/>
               </a:spcAft>
@@ -4485,7 +4829,7 @@
             <a:endParaRPr lang="en-US" sz="1150" dirty="0"/>
           </a:p>
           <a:p>
-            <a:pPr marL="0" indent="0">
+            <a:pPr indent="0" marL="0">
               <a:spcAft>
                 <a:spcPts val="600"/>
               </a:spcAft>
@@ -4505,7 +4849,7 @@
             <a:endParaRPr lang="en-US" sz="1150" dirty="0"/>
           </a:p>
           <a:p>
-            <a:pPr marL="0" indent="0">
+            <a:pPr indent="0" marL="0">
               <a:spcAft>
                 <a:spcPts val="600"/>
               </a:spcAft>
@@ -4525,7 +4869,7 @@
             <a:endParaRPr lang="en-US" sz="1150" dirty="0"/>
           </a:p>
           <a:p>
-            <a:pPr marL="0" indent="0">
+            <a:pPr indent="0" marL="0">
               <a:spcAft>
                 <a:spcPts val="600"/>
               </a:spcAft>
@@ -4545,7 +4889,7 @@
             <a:endParaRPr lang="en-US" sz="1150" dirty="0"/>
           </a:p>
           <a:p>
-            <a:pPr marL="0" indent="0">
+            <a:pPr indent="0" marL="0">
               <a:spcAft>
                 <a:spcPts val="600"/>
               </a:spcAft>
@@ -4565,7 +4909,7 @@
             <a:endParaRPr lang="en-US" sz="1150" dirty="0"/>
           </a:p>
           <a:p>
-            <a:pPr marL="0" indent="0">
+            <a:pPr indent="0" marL="0">
               <a:spcAft>
                 <a:spcPts val="600"/>
               </a:spcAft>
@@ -4585,7 +4929,7 @@
             <a:endParaRPr lang="en-US" sz="1150" dirty="0"/>
           </a:p>
           <a:p>
-            <a:pPr marL="0" indent="0">
+            <a:pPr indent="0" marL="0">
               <a:spcAft>
                 <a:spcPts val="600"/>
               </a:spcAft>
@@ -4605,7 +4949,7 @@
             <a:endParaRPr lang="en-US" sz="1150" dirty="0"/>
           </a:p>
           <a:p>
-            <a:pPr marL="0" indent="0">
+            <a:pPr indent="0" marL="0">
               <a:spcAft>
                 <a:spcPts val="600"/>
               </a:spcAft>
@@ -4647,7 +4991,7 @@
           </a:solidFill>
           <a:ln/>
           <a:effectLst>
-            <a:outerShdw blurRad="101600" dist="38100" dir="5400000" algn="bl" rotWithShape="0">
+            <a:outerShdw sx="100000" sy="100000" kx="0" ky="0" algn="bl" rotWithShape="0" blurRad="101600" dist="38100" dir="5400000">
               <a:srgbClr val="000000">
                 <a:alpha val="35000"/>
               </a:srgbClr>
@@ -4676,7 +5020,7 @@
           <a:bodyPr wrap="square" lIns="0" tIns="0" rIns="0" bIns="0" rtlCol="0" anchor="ctr"/>
           <a:lstStyle/>
           <a:p>
-            <a:pPr marL="0" indent="0">
+            <a:pPr indent="0" marL="0">
               <a:buNone/>
             </a:pPr>
             <a:r>
@@ -4863,6 +5207,9 @@
           <a:bodyPr wrap="square" lIns="0" tIns="0" rIns="0" bIns="0" rtlCol="0" anchor="ctr"/>
           <a:lstStyle/>
           <a:p>
+            <a:pPr indent="0" marL="0">
+              <a:buNone/>
+            </a:pPr>
             <a:r>
               <a:rPr lang="en-US" sz="1100" i="1" dirty="0">
                 <a:solidFill>
@@ -4872,7 +5219,7 @@
                 <a:ea typeface="Arial" pitchFamily="34" charset="-122"/>
                 <a:cs typeface="Arial" pitchFamily="34" charset="-120"/>
               </a:rPr>
-              <a:t>GitHub Repository:  &lt;https://github.com/springboardmentor873-a11y/https-github.com-springboardmentorpl-Higher-Education-Performance-Dashboard-Group-2/tree/Varun-Kumar-Kesineni&gt;</a:t>
+              <a:t>GitHub Repository:  &lt;add repository URL here&gt;</a:t>
             </a:r>
             <a:endParaRPr lang="en-US" sz="1100" dirty="0"/>
           </a:p>
@@ -4899,9 +5246,20 @@
           <a:bodyPr wrap="square" lIns="0" tIns="0" rIns="0" bIns="0" rtlCol="0" anchor="ctr"/>
           <a:lstStyle/>
           <a:p>
-            <a:pPr marL="0" indent="0" algn="l">
-              <a:buNone/>
-            </a:pPr>
+            <a:pPr algn="l" indent="0" marL="0">
+              <a:buNone/>
+            </a:pPr>
+            <a:r>
+              <a:rPr lang="en-US" sz="900" dirty="0">
+                <a:solidFill>
+                  <a:srgbClr val="B0AFD3"/>
+                </a:solidFill>
+                <a:latin typeface="Arial" pitchFamily="34" charset="0"/>
+                <a:ea typeface="Arial" pitchFamily="34" charset="-122"/>
+                <a:cs typeface="Arial" pitchFamily="34" charset="-120"/>
+              </a:rPr>
+              <a:t>EduVision</a:t>
+            </a:r>
             <a:endParaRPr lang="en-US" sz="900" dirty="0"/>
           </a:p>
         </p:txBody>
@@ -4927,7 +5285,7 @@
           <a:bodyPr wrap="square" lIns="0" tIns="0" rIns="0" bIns="0" rtlCol="0" anchor="ctr"/>
           <a:lstStyle/>
           <a:p>
-            <a:pPr marL="0" indent="0" algn="r">
+            <a:pPr algn="r" indent="0" marL="0">
               <a:buNone/>
             </a:pPr>
             <a:r>
@@ -4961,7 +5319,6 @@
         <a:solidFill>
           <a:srgbClr val="1A1F4A"/>
         </a:solidFill>
-        <a:effectLst/>
       </p:bgPr>
     </p:bg>
     <p:spTree>
@@ -5043,7 +5400,7 @@
           <a:bodyPr wrap="square" lIns="0" tIns="0" rIns="0" bIns="0" rtlCol="0" anchor="ctr"/>
           <a:lstStyle/>
           <a:p>
-            <a:pPr marL="0" indent="0">
+            <a:pPr indent="0" marL="0">
               <a:buNone/>
             </a:pPr>
             <a:r>
@@ -5063,6 +5420,35 @@
       </p:sp>
       <p:sp>
         <p:nvSpPr>
+          <p:cNvPr id="5" name="Shape 3"/>
+          <p:cNvSpPr/>
+          <p:nvPr/>
+        </p:nvSpPr>
+        <p:spPr>
+          <a:xfrm>
+            <a:off x="502920" y="2103120"/>
+            <a:ext cx="11155680" cy="2377440"/>
+          </a:xfrm>
+          <a:prstGeom prst="roundRect">
+            <a:avLst>
+              <a:gd name="adj" fmla="val 4615"/>
+            </a:avLst>
+          </a:prstGeom>
+          <a:solidFill>
+            <a:srgbClr val="232A5C"/>
+          </a:solidFill>
+          <a:ln/>
+          <a:effectLst>
+            <a:outerShdw sx="100000" sy="100000" kx="0" ky="0" algn="bl" rotWithShape="0" blurRad="101600" dist="38100" dir="5400000">
+              <a:srgbClr val="000000">
+                <a:alpha val="35000"/>
+              </a:srgbClr>
+            </a:outerShdw>
+          </a:effectLst>
+        </p:spPr>
+      </p:sp>
+      <p:sp>
+        <p:nvSpPr>
           <p:cNvPr id="6" name="Text 4"/>
           <p:cNvSpPr/>
           <p:nvPr/>
@@ -5082,7 +5468,7 @@
           <a:bodyPr wrap="square" lIns="0" tIns="0" rIns="0" bIns="0" rtlCol="0" anchor="ctr"/>
           <a:lstStyle/>
           <a:p>
-            <a:pPr marL="0" indent="0">
+            <a:pPr indent="0" marL="0">
               <a:buNone/>
             </a:pPr>
             <a:r>
@@ -5094,33 +5480,48 @@
                 <a:ea typeface="Calibri" pitchFamily="34" charset="-122"/>
                 <a:cs typeface="Calibri" pitchFamily="34" charset="-120"/>
               </a:rPr>
-              <a:t>Varun Kumar </a:t>
-            </a:r>
-            <a:r>
-              <a:rPr lang="en-US" sz="2400" b="1" dirty="0" err="1">
-                <a:solidFill>
-                  <a:srgbClr val="FFFFFF"/>
-                </a:solidFill>
-                <a:latin typeface="Calibri" pitchFamily="34" charset="0"/>
-                <a:ea typeface="Calibri" pitchFamily="34" charset="-122"/>
-                <a:cs typeface="Calibri" pitchFamily="34" charset="-120"/>
-              </a:rPr>
-              <a:t>Kesineni</a:t>
-            </a:r>
-            <a:endParaRPr lang="en-US" sz="2400" b="1" dirty="0">
-              <a:solidFill>
-                <a:srgbClr val="FFFFFF"/>
-              </a:solidFill>
-              <a:latin typeface="Calibri" pitchFamily="34" charset="0"/>
-              <a:ea typeface="Calibri" pitchFamily="34" charset="-122"/>
-              <a:cs typeface="Calibri" pitchFamily="34" charset="-120"/>
-            </a:endParaRPr>
-          </a:p>
-          <a:p>
-            <a:pPr marL="0" indent="0">
-              <a:buNone/>
-            </a:pPr>
+              <a:t>Varun</a:t>
+            </a:r>
             <a:endParaRPr lang="en-US" sz="2400" dirty="0"/>
+          </a:p>
+        </p:txBody>
+      </p:sp>
+      <p:sp>
+        <p:nvSpPr>
+          <p:cNvPr id="7" name="Text 5"/>
+          <p:cNvSpPr/>
+          <p:nvPr/>
+        </p:nvSpPr>
+        <p:spPr>
+          <a:xfrm>
+            <a:off x="914400" y="3063240"/>
+            <a:ext cx="10058400" cy="365760"/>
+          </a:xfrm>
+          <a:prstGeom prst="rect">
+            <a:avLst/>
+          </a:prstGeom>
+          <a:noFill/>
+          <a:ln/>
+        </p:spPr>
+        <p:txBody>
+          <a:bodyPr wrap="square" lIns="0" tIns="0" rIns="0" bIns="0" rtlCol="0" anchor="ctr"/>
+          <a:lstStyle/>
+          <a:p>
+            <a:pPr indent="0" marL="0">
+              <a:buNone/>
+            </a:pPr>
+            <a:r>
+              <a:rPr lang="en-US" sz="1300" dirty="0">
+                <a:solidFill>
+                  <a:srgbClr val="D2EEFF"/>
+                </a:solidFill>
+                <a:latin typeface="Arial" pitchFamily="34" charset="0"/>
+                <a:ea typeface="Arial" pitchFamily="34" charset="-122"/>
+                <a:cs typeface="Arial" pitchFamily="34" charset="-120"/>
+              </a:rPr>
+              <a:t>B.Tech Student, CMR College of Engineering &amp; Technology</a:t>
+            </a:r>
+            <a:endParaRPr lang="en-US" sz="1300" dirty="0"/>
           </a:p>
         </p:txBody>
       </p:sp>
@@ -5145,7 +5546,7 @@
           <a:bodyPr wrap="square" lIns="0" tIns="0" rIns="0" bIns="0" rtlCol="0" anchor="ctr"/>
           <a:lstStyle/>
           <a:p>
-            <a:pPr marL="0" indent="0">
+            <a:pPr indent="0" marL="0">
               <a:buNone/>
             </a:pPr>
             <a:r>
@@ -5184,9 +5585,20 @@
           <a:bodyPr wrap="square" lIns="0" tIns="0" rIns="0" bIns="0" rtlCol="0" anchor="ctr"/>
           <a:lstStyle/>
           <a:p>
-            <a:pPr marL="0" indent="0" algn="l">
-              <a:buNone/>
-            </a:pPr>
+            <a:pPr algn="l" indent="0" marL="0">
+              <a:buNone/>
+            </a:pPr>
+            <a:r>
+              <a:rPr lang="en-US" sz="900" dirty="0">
+                <a:solidFill>
+                  <a:srgbClr val="B0AFD3"/>
+                </a:solidFill>
+                <a:latin typeface="Arial" pitchFamily="34" charset="0"/>
+                <a:ea typeface="Arial" pitchFamily="34" charset="-122"/>
+                <a:cs typeface="Arial" pitchFamily="34" charset="-120"/>
+              </a:rPr>
+              <a:t>EduVision</a:t>
+            </a:r>
             <a:endParaRPr lang="en-US" sz="900" dirty="0"/>
           </a:p>
         </p:txBody>
@@ -5212,7 +5624,7 @@
           <a:bodyPr wrap="square" lIns="0" tIns="0" rIns="0" bIns="0" rtlCol="0" anchor="ctr"/>
           <a:lstStyle/>
           <a:p>
-            <a:pPr marL="0" indent="0" algn="r">
+            <a:pPr algn="r" indent="0" marL="0">
               <a:buNone/>
             </a:pPr>
             <a:r>
@@ -5246,7 +5658,6 @@
         <a:solidFill>
           <a:srgbClr val="030733"/>
         </a:solidFill>
-        <a:effectLst/>
       </p:bgPr>
     </p:bg>
     <p:spTree>
@@ -5306,7 +5717,7 @@
           <a:bodyPr wrap="square" lIns="0" tIns="0" rIns="0" bIns="0" rtlCol="0" anchor="ctr"/>
           <a:lstStyle/>
           <a:p>
-            <a:pPr marL="0" indent="0" algn="ctr">
+            <a:pPr algn="ctr" indent="0" marL="0">
               <a:buNone/>
             </a:pPr>
             <a:r>
@@ -5340,7 +5751,6 @@
         <a:solidFill>
           <a:srgbClr val="030733"/>
         </a:solidFill>
-        <a:effectLst/>
       </p:bgPr>
     </p:bg>
     <p:spTree>
@@ -5400,7 +5810,7 @@
           <a:bodyPr wrap="square" lIns="0" tIns="0" rIns="0" bIns="0" rtlCol="0" anchor="ctr"/>
           <a:lstStyle/>
           <a:p>
-            <a:pPr marL="0" indent="0">
+            <a:pPr indent="0" marL="0">
               <a:buNone/>
             </a:pPr>
             <a:r>
@@ -5439,11 +5849,11 @@
           <a:bodyPr wrap="square" lIns="0" tIns="0" rIns="0" bIns="0" rtlCol="0" anchor="ctr"/>
           <a:lstStyle/>
           <a:p>
-            <a:pPr marL="0" indent="0">
-              <a:buNone/>
-            </a:pPr>
-            <a:r>
-              <a:rPr lang="en-US" sz="1400" dirty="0" err="1">
+            <a:pPr indent="0" marL="0">
+              <a:buNone/>
+            </a:pPr>
+            <a:r>
+              <a:rPr lang="en-US" sz="1400" dirty="0">
                 <a:solidFill>
                   <a:srgbClr val="B0AFD3"/>
                 </a:solidFill>
@@ -5451,18 +5861,7 @@
                 <a:ea typeface="Arial" pitchFamily="34" charset="-122"/>
                 <a:cs typeface="Arial" pitchFamily="34" charset="-120"/>
               </a:rPr>
-              <a:t>EduVision</a:t>
-            </a:r>
-            <a:r>
-              <a:rPr lang="en-US" sz="1400" dirty="0">
-                <a:solidFill>
-                  <a:srgbClr val="B0AFD3"/>
-                </a:solidFill>
-                <a:latin typeface="Arial" pitchFamily="34" charset="0"/>
-                <a:ea typeface="Arial" pitchFamily="34" charset="-122"/>
-                <a:cs typeface="Arial" pitchFamily="34" charset="-120"/>
-              </a:rPr>
-              <a:t> — Higher Education Performance Analytics Dashboard</a:t>
+              <a:t>EduVision — Higher Education Performance Analytics Dashboard</a:t>
             </a:r>
             <a:endParaRPr lang="en-US" sz="1400" dirty="0"/>
           </a:p>
@@ -5484,7 +5883,6 @@
         <a:solidFill>
           <a:srgbClr val="1A1F4A"/>
         </a:solidFill>
-        <a:effectLst/>
       </p:bgPr>
     </p:bg>
     <p:spTree>
@@ -5544,13 +5942,6 @@
           </a:solidFill>
           <a:ln/>
         </p:spPr>
-        <p:txBody>
-          <a:bodyPr/>
-          <a:lstStyle/>
-          <a:p>
-            <a:endParaRPr lang="en-IN" dirty="0"/>
-          </a:p>
-        </p:txBody>
       </p:sp>
       <p:sp>
         <p:nvSpPr>
@@ -5573,11 +5964,11 @@
           <a:bodyPr wrap="square" lIns="0" tIns="0" rIns="0" bIns="0" rtlCol="0" anchor="ctr"/>
           <a:lstStyle/>
           <a:p>
-            <a:pPr marL="0" indent="0">
-              <a:buNone/>
-            </a:pPr>
-            <a:r>
-              <a:rPr lang="en-US" sz="1200" b="1" kern="0" spc="200" dirty="0">
+            <a:pPr indent="0" marL="0">
+              <a:buNone/>
+            </a:pPr>
+            <a:r>
+              <a:rPr lang="en-US" sz="1200" b="1" spc="200" kern="0" dirty="0">
                 <a:solidFill>
                   <a:srgbClr val="2BCA81"/>
                 </a:solidFill>
@@ -5612,7 +6003,7 @@
           <a:bodyPr wrap="square" lIns="0" tIns="0" rIns="0" bIns="0" rtlCol="0" anchor="ctr"/>
           <a:lstStyle/>
           <a:p>
-            <a:pPr marL="0" indent="0">
+            <a:pPr indent="0" marL="0">
               <a:buNone/>
             </a:pPr>
             <a:r>
@@ -5651,7 +6042,7 @@
           </a:solidFill>
           <a:ln/>
           <a:effectLst>
-            <a:outerShdw blurRad="101600" dist="38100" dir="5400000" algn="bl" rotWithShape="0">
+            <a:outerShdw sx="100000" sy="100000" kx="0" ky="0" algn="bl" rotWithShape="0" blurRad="101600" dist="38100" dir="5400000">
               <a:srgbClr val="000000">
                 <a:alpha val="35000"/>
               </a:srgbClr>
@@ -5700,7 +6091,7 @@
           <a:bodyPr wrap="square" lIns="0" tIns="0" rIns="0" bIns="0" rtlCol="0" anchor="ctr"/>
           <a:lstStyle/>
           <a:p>
-            <a:pPr marL="0" indent="0" algn="ctr">
+            <a:pPr algn="ctr" indent="0" marL="0">
               <a:buNone/>
             </a:pPr>
             <a:r>
@@ -5739,7 +6130,7 @@
           <a:bodyPr wrap="square" lIns="0" tIns="0" rIns="0" bIns="0" rtlCol="0" anchor="ctr"/>
           <a:lstStyle/>
           <a:p>
-            <a:pPr marL="0" indent="0">
+            <a:pPr indent="0" marL="0">
               <a:buNone/>
             </a:pPr>
             <a:r>
@@ -5778,7 +6169,7 @@
           <a:bodyPr wrap="square" lIns="0" tIns="0" rIns="0" bIns="0" rtlCol="0" anchor="ctr"/>
           <a:lstStyle/>
           <a:p>
-            <a:pPr marL="0" indent="0">
+            <a:pPr indent="0" marL="0">
               <a:lnSpc>
                 <a:spcPct val="115000"/>
               </a:lnSpc>
@@ -5820,7 +6211,7 @@
           </a:solidFill>
           <a:ln/>
           <a:effectLst>
-            <a:outerShdw blurRad="101600" dist="38100" dir="5400000" algn="bl" rotWithShape="0">
+            <a:outerShdw sx="100000" sy="100000" kx="0" ky="0" algn="bl" rotWithShape="0" blurRad="101600" dist="38100" dir="5400000">
               <a:srgbClr val="000000">
                 <a:alpha val="35000"/>
               </a:srgbClr>
@@ -5869,7 +6260,7 @@
           <a:bodyPr wrap="square" lIns="0" tIns="0" rIns="0" bIns="0" rtlCol="0" anchor="ctr"/>
           <a:lstStyle/>
           <a:p>
-            <a:pPr marL="0" indent="0" algn="ctr">
+            <a:pPr algn="ctr" indent="0" marL="0">
               <a:buNone/>
             </a:pPr>
             <a:r>
@@ -5908,7 +6299,7 @@
           <a:bodyPr wrap="square" lIns="0" tIns="0" rIns="0" bIns="0" rtlCol="0" anchor="ctr"/>
           <a:lstStyle/>
           <a:p>
-            <a:pPr marL="0" indent="0">
+            <a:pPr indent="0" marL="0">
               <a:buNone/>
             </a:pPr>
             <a:r>
@@ -5947,7 +6338,7 @@
           <a:bodyPr wrap="square" lIns="0" tIns="0" rIns="0" bIns="0" rtlCol="0" anchor="ctr"/>
           <a:lstStyle/>
           <a:p>
-            <a:pPr marL="0" indent="0">
+            <a:pPr indent="0" marL="0">
               <a:lnSpc>
                 <a:spcPct val="115000"/>
               </a:lnSpc>
@@ -5989,7 +6380,7 @@
           </a:solidFill>
           <a:ln/>
           <a:effectLst>
-            <a:outerShdw blurRad="101600" dist="38100" dir="5400000" algn="bl" rotWithShape="0">
+            <a:outerShdw sx="100000" sy="100000" kx="0" ky="0" algn="bl" rotWithShape="0" blurRad="101600" dist="38100" dir="5400000">
               <a:srgbClr val="000000">
                 <a:alpha val="35000"/>
               </a:srgbClr>
@@ -6038,7 +6429,7 @@
           <a:bodyPr wrap="square" lIns="0" tIns="0" rIns="0" bIns="0" rtlCol="0" anchor="ctr"/>
           <a:lstStyle/>
           <a:p>
-            <a:pPr marL="0" indent="0" algn="ctr">
+            <a:pPr algn="ctr" indent="0" marL="0">
               <a:buNone/>
             </a:pPr>
             <a:r>
@@ -6077,7 +6468,7 @@
           <a:bodyPr wrap="square" lIns="0" tIns="0" rIns="0" bIns="0" rtlCol="0" anchor="ctr"/>
           <a:lstStyle/>
           <a:p>
-            <a:pPr marL="0" indent="0">
+            <a:pPr indent="0" marL="0">
               <a:buNone/>
             </a:pPr>
             <a:r>
@@ -6116,7 +6507,7 @@
           <a:bodyPr wrap="square" lIns="0" tIns="0" rIns="0" bIns="0" rtlCol="0" anchor="ctr"/>
           <a:lstStyle/>
           <a:p>
-            <a:pPr marL="0" indent="0">
+            <a:pPr indent="0" marL="0">
               <a:lnSpc>
                 <a:spcPct val="115000"/>
               </a:lnSpc>
@@ -6158,7 +6549,7 @@
           </a:solidFill>
           <a:ln/>
           <a:effectLst>
-            <a:outerShdw blurRad="101600" dist="38100" dir="5400000" algn="bl" rotWithShape="0">
+            <a:outerShdw sx="100000" sy="100000" kx="0" ky="0" algn="bl" rotWithShape="0" blurRad="101600" dist="38100" dir="5400000">
               <a:srgbClr val="000000">
                 <a:alpha val="35000"/>
               </a:srgbClr>
@@ -6207,7 +6598,7 @@
           <a:bodyPr wrap="square" lIns="0" tIns="0" rIns="0" bIns="0" rtlCol="0" anchor="ctr"/>
           <a:lstStyle/>
           <a:p>
-            <a:pPr marL="0" indent="0" algn="ctr">
+            <a:pPr algn="ctr" indent="0" marL="0">
               <a:buNone/>
             </a:pPr>
             <a:r>
@@ -6246,7 +6637,7 @@
           <a:bodyPr wrap="square" lIns="0" tIns="0" rIns="0" bIns="0" rtlCol="0" anchor="ctr"/>
           <a:lstStyle/>
           <a:p>
-            <a:pPr marL="0" indent="0">
+            <a:pPr indent="0" marL="0">
               <a:buNone/>
             </a:pPr>
             <a:r>
@@ -6285,7 +6676,7 @@
           <a:bodyPr wrap="square" lIns="0" tIns="0" rIns="0" bIns="0" rtlCol="0" anchor="ctr"/>
           <a:lstStyle/>
           <a:p>
-            <a:pPr marL="0" indent="0">
+            <a:pPr indent="0" marL="0">
               <a:lnSpc>
                 <a:spcPct val="115000"/>
               </a:lnSpc>
@@ -6327,9 +6718,20 @@
           <a:bodyPr wrap="square" lIns="0" tIns="0" rIns="0" bIns="0" rtlCol="0" anchor="ctr"/>
           <a:lstStyle/>
           <a:p>
-            <a:pPr marL="0" indent="0" algn="l">
-              <a:buNone/>
-            </a:pPr>
+            <a:pPr algn="l" indent="0" marL="0">
+              <a:buNone/>
+            </a:pPr>
+            <a:r>
+              <a:rPr lang="en-US" sz="900" dirty="0">
+                <a:solidFill>
+                  <a:srgbClr val="B0AFD3"/>
+                </a:solidFill>
+                <a:latin typeface="Arial" pitchFamily="34" charset="0"/>
+                <a:ea typeface="Arial" pitchFamily="34" charset="-122"/>
+                <a:cs typeface="Arial" pitchFamily="34" charset="-120"/>
+              </a:rPr>
+              <a:t>EduVision</a:t>
+            </a:r>
             <a:endParaRPr lang="en-US" sz="900" dirty="0"/>
           </a:p>
         </p:txBody>
@@ -6355,7 +6757,7 @@
           <a:bodyPr wrap="square" lIns="0" tIns="0" rIns="0" bIns="0" rtlCol="0" anchor="ctr"/>
           <a:lstStyle/>
           <a:p>
-            <a:pPr marL="0" indent="0" algn="r">
+            <a:pPr algn="r" indent="0" marL="0">
               <a:buNone/>
             </a:pPr>
             <a:r>
@@ -6389,7 +6791,6 @@
         <a:solidFill>
           <a:srgbClr val="1A1F4A"/>
         </a:solidFill>
-        <a:effectLst/>
       </p:bgPr>
     </p:bg>
     <p:spTree>
@@ -6471,11 +6872,11 @@
           <a:bodyPr wrap="square" lIns="0" tIns="0" rIns="0" bIns="0" rtlCol="0" anchor="ctr"/>
           <a:lstStyle/>
           <a:p>
-            <a:pPr marL="0" indent="0">
-              <a:buNone/>
-            </a:pPr>
-            <a:r>
-              <a:rPr lang="en-US" sz="1200" b="1" kern="0" spc="200" dirty="0">
+            <a:pPr indent="0" marL="0">
+              <a:buNone/>
+            </a:pPr>
+            <a:r>
+              <a:rPr lang="en-US" sz="1200" b="1" spc="200" kern="0" dirty="0">
                 <a:solidFill>
                   <a:srgbClr val="2BCA81"/>
                 </a:solidFill>
@@ -6510,7 +6911,7 @@
           <a:bodyPr wrap="square" lIns="0" tIns="0" rIns="0" bIns="0" rtlCol="0" anchor="ctr"/>
           <a:lstStyle/>
           <a:p>
-            <a:pPr marL="0" indent="0">
+            <a:pPr indent="0" marL="0">
               <a:buNone/>
             </a:pPr>
             <a:r>
@@ -6549,7 +6950,7 @@
           </a:solidFill>
           <a:ln/>
           <a:effectLst>
-            <a:outerShdw blurRad="101600" dist="38100" dir="5400000" algn="bl" rotWithShape="0">
+            <a:outerShdw sx="100000" sy="100000" kx="0" ky="0" algn="bl" rotWithShape="0" blurRad="101600" dist="38100" dir="5400000">
               <a:srgbClr val="000000">
                 <a:alpha val="35000"/>
               </a:srgbClr>
@@ -6598,7 +6999,7 @@
           <a:bodyPr wrap="square" lIns="0" tIns="0" rIns="0" bIns="0" rtlCol="0" anchor="ctr"/>
           <a:lstStyle/>
           <a:p>
-            <a:pPr marL="0" indent="0" algn="ctr">
+            <a:pPr algn="ctr" indent="0" marL="0">
               <a:buNone/>
             </a:pPr>
             <a:r>
@@ -6637,7 +7038,7 @@
           <a:bodyPr wrap="square" lIns="0" tIns="0" rIns="0" bIns="0" rtlCol="0" anchor="ctr"/>
           <a:lstStyle/>
           <a:p>
-            <a:pPr marL="0" indent="0">
+            <a:pPr indent="0" marL="0">
               <a:buNone/>
             </a:pPr>
             <a:r>
@@ -6676,7 +7077,7 @@
           <a:bodyPr wrap="square" lIns="0" tIns="0" rIns="0" bIns="0" rtlCol="0" anchor="ctr"/>
           <a:lstStyle/>
           <a:p>
-            <a:pPr marL="0" indent="0">
+            <a:pPr indent="0" marL="0">
               <a:lnSpc>
                 <a:spcPct val="115000"/>
               </a:lnSpc>
@@ -6718,7 +7119,7 @@
           </a:solidFill>
           <a:ln/>
           <a:effectLst>
-            <a:outerShdw blurRad="101600" dist="38100" dir="5400000" algn="bl" rotWithShape="0">
+            <a:outerShdw sx="100000" sy="100000" kx="0" ky="0" algn="bl" rotWithShape="0" blurRad="101600" dist="38100" dir="5400000">
               <a:srgbClr val="000000">
                 <a:alpha val="35000"/>
               </a:srgbClr>
@@ -6767,7 +7168,7 @@
           <a:bodyPr wrap="square" lIns="0" tIns="0" rIns="0" bIns="0" rtlCol="0" anchor="ctr"/>
           <a:lstStyle/>
           <a:p>
-            <a:pPr marL="0" indent="0" algn="ctr">
+            <a:pPr algn="ctr" indent="0" marL="0">
               <a:buNone/>
             </a:pPr>
             <a:r>
@@ -6806,7 +7207,7 @@
           <a:bodyPr wrap="square" lIns="0" tIns="0" rIns="0" bIns="0" rtlCol="0" anchor="ctr"/>
           <a:lstStyle/>
           <a:p>
-            <a:pPr marL="0" indent="0">
+            <a:pPr indent="0" marL="0">
               <a:buNone/>
             </a:pPr>
             <a:r>
@@ -6845,7 +7246,7 @@
           <a:bodyPr wrap="square" lIns="0" tIns="0" rIns="0" bIns="0" rtlCol="0" anchor="ctr"/>
           <a:lstStyle/>
           <a:p>
-            <a:pPr marL="0" indent="0">
+            <a:pPr indent="0" marL="0">
               <a:lnSpc>
                 <a:spcPct val="115000"/>
               </a:lnSpc>
@@ -6887,7 +7288,7 @@
           </a:solidFill>
           <a:ln/>
           <a:effectLst>
-            <a:outerShdw blurRad="101600" dist="38100" dir="5400000" algn="bl" rotWithShape="0">
+            <a:outerShdw sx="100000" sy="100000" kx="0" ky="0" algn="bl" rotWithShape="0" blurRad="101600" dist="38100" dir="5400000">
               <a:srgbClr val="000000">
                 <a:alpha val="35000"/>
               </a:srgbClr>
@@ -6936,7 +7337,7 @@
           <a:bodyPr wrap="square" lIns="0" tIns="0" rIns="0" bIns="0" rtlCol="0" anchor="ctr"/>
           <a:lstStyle/>
           <a:p>
-            <a:pPr marL="0" indent="0" algn="ctr">
+            <a:pPr algn="ctr" indent="0" marL="0">
               <a:buNone/>
             </a:pPr>
             <a:r>
@@ -6975,7 +7376,7 @@
           <a:bodyPr wrap="square" lIns="0" tIns="0" rIns="0" bIns="0" rtlCol="0" anchor="ctr"/>
           <a:lstStyle/>
           <a:p>
-            <a:pPr marL="0" indent="0">
+            <a:pPr indent="0" marL="0">
               <a:buNone/>
             </a:pPr>
             <a:r>
@@ -7014,7 +7415,7 @@
           <a:bodyPr wrap="square" lIns="0" tIns="0" rIns="0" bIns="0" rtlCol="0" anchor="ctr"/>
           <a:lstStyle/>
           <a:p>
-            <a:pPr marL="0" indent="0">
+            <a:pPr indent="0" marL="0">
               <a:lnSpc>
                 <a:spcPct val="115000"/>
               </a:lnSpc>
@@ -7056,7 +7457,7 @@
           </a:solidFill>
           <a:ln/>
           <a:effectLst>
-            <a:outerShdw blurRad="101600" dist="38100" dir="5400000" algn="bl" rotWithShape="0">
+            <a:outerShdw sx="100000" sy="100000" kx="0" ky="0" algn="bl" rotWithShape="0" blurRad="101600" dist="38100" dir="5400000">
               <a:srgbClr val="000000">
                 <a:alpha val="35000"/>
               </a:srgbClr>
@@ -7105,7 +7506,7 @@
           <a:bodyPr wrap="square" lIns="0" tIns="0" rIns="0" bIns="0" rtlCol="0" anchor="ctr"/>
           <a:lstStyle/>
           <a:p>
-            <a:pPr marL="0" indent="0" algn="ctr">
+            <a:pPr algn="ctr" indent="0" marL="0">
               <a:buNone/>
             </a:pPr>
             <a:r>
@@ -7144,7 +7545,7 @@
           <a:bodyPr wrap="square" lIns="0" tIns="0" rIns="0" bIns="0" rtlCol="0" anchor="ctr"/>
           <a:lstStyle/>
           <a:p>
-            <a:pPr marL="0" indent="0">
+            <a:pPr indent="0" marL="0">
               <a:buNone/>
             </a:pPr>
             <a:r>
@@ -7183,7 +7584,7 @@
           <a:bodyPr wrap="square" lIns="0" tIns="0" rIns="0" bIns="0" rtlCol="0" anchor="ctr"/>
           <a:lstStyle/>
           <a:p>
-            <a:pPr marL="0" indent="0">
+            <a:pPr indent="0" marL="0">
               <a:lnSpc>
                 <a:spcPct val="115000"/>
               </a:lnSpc>
@@ -7225,9 +7626,20 @@
           <a:bodyPr wrap="square" lIns="0" tIns="0" rIns="0" bIns="0" rtlCol="0" anchor="ctr"/>
           <a:lstStyle/>
           <a:p>
-            <a:pPr marL="0" indent="0" algn="l">
-              <a:buNone/>
-            </a:pPr>
+            <a:pPr algn="l" indent="0" marL="0">
+              <a:buNone/>
+            </a:pPr>
+            <a:r>
+              <a:rPr lang="en-US" sz="900" dirty="0">
+                <a:solidFill>
+                  <a:srgbClr val="B0AFD3"/>
+                </a:solidFill>
+                <a:latin typeface="Arial" pitchFamily="34" charset="0"/>
+                <a:ea typeface="Arial" pitchFamily="34" charset="-122"/>
+                <a:cs typeface="Arial" pitchFamily="34" charset="-120"/>
+              </a:rPr>
+              <a:t>EduVision</a:t>
+            </a:r>
             <a:endParaRPr lang="en-US" sz="900" dirty="0"/>
           </a:p>
         </p:txBody>
@@ -7253,7 +7665,7 @@
           <a:bodyPr wrap="square" lIns="0" tIns="0" rIns="0" bIns="0" rtlCol="0" anchor="ctr"/>
           <a:lstStyle/>
           <a:p>
-            <a:pPr marL="0" indent="0" algn="r">
+            <a:pPr algn="r" indent="0" marL="0">
               <a:buNone/>
             </a:pPr>
             <a:r>
@@ -7287,7 +7699,6 @@
         <a:solidFill>
           <a:srgbClr val="030733"/>
         </a:solidFill>
-        <a:effectLst/>
       </p:bgPr>
     </p:bg>
     <p:spTree>
@@ -7369,11 +7780,11 @@
           <a:bodyPr wrap="square" lIns="0" tIns="0" rIns="0" bIns="0" rtlCol="0" anchor="ctr"/>
           <a:lstStyle/>
           <a:p>
-            <a:pPr marL="0" indent="0">
-              <a:buNone/>
-            </a:pPr>
-            <a:r>
-              <a:rPr lang="en-US" sz="1200" b="1" kern="0" spc="200" dirty="0">
+            <a:pPr indent="0" marL="0">
+              <a:buNone/>
+            </a:pPr>
+            <a:r>
+              <a:rPr lang="en-US" sz="1200" b="1" spc="200" kern="0" dirty="0">
                 <a:solidFill>
                   <a:srgbClr val="2BCA81"/>
                 </a:solidFill>
@@ -7408,7 +7819,7 @@
           <a:bodyPr wrap="square" lIns="0" tIns="0" rIns="0" bIns="0" rtlCol="0" anchor="ctr"/>
           <a:lstStyle/>
           <a:p>
-            <a:pPr marL="0" indent="0">
+            <a:pPr indent="0" marL="0">
               <a:buNone/>
             </a:pPr>
             <a:r>
@@ -7434,7 +7845,7 @@
         </p:nvSpPr>
         <p:spPr>
           <a:xfrm>
-            <a:off x="512752" y="1783080"/>
+            <a:off x="502920" y="1783080"/>
             <a:ext cx="5349240" cy="2331720"/>
           </a:xfrm>
           <a:prstGeom prst="roundRect">
@@ -7447,7 +7858,7 @@
           </a:solidFill>
           <a:ln/>
           <a:effectLst>
-            <a:outerShdw blurRad="101600" dist="38100" dir="5400000" algn="bl" rotWithShape="0">
+            <a:outerShdw sx="100000" sy="100000" kx="0" ky="0" algn="bl" rotWithShape="0" blurRad="101600" dist="38100" dir="5400000">
               <a:srgbClr val="000000">
                 <a:alpha val="35000"/>
               </a:srgbClr>
@@ -7476,7 +7887,7 @@
           <a:bodyPr wrap="square" lIns="0" tIns="0" rIns="0" bIns="0" rtlCol="0" anchor="ctr"/>
           <a:lstStyle/>
           <a:p>
-            <a:pPr marL="0" indent="0">
+            <a:pPr indent="0" marL="0">
               <a:buNone/>
             </a:pPr>
             <a:r>
@@ -7515,7 +7926,7 @@
           <a:bodyPr wrap="square" lIns="0" tIns="0" rIns="0" bIns="0" rtlCol="0" anchor="ctr"/>
           <a:lstStyle/>
           <a:p>
-            <a:pPr marL="0" indent="0">
+            <a:pPr indent="0" marL="0">
               <a:buNone/>
             </a:pPr>
             <a:r>
@@ -7554,7 +7965,7 @@
           <a:bodyPr wrap="square" lIns="0" tIns="0" rIns="0" bIns="0" rtlCol="0" anchor="ctr"/>
           <a:lstStyle/>
           <a:p>
-            <a:pPr marL="0" indent="0">
+            <a:pPr indent="0" marL="0">
               <a:lnSpc>
                 <a:spcPct val="120000"/>
               </a:lnSpc>
@@ -7596,7 +8007,7 @@
           </a:solidFill>
           <a:ln/>
           <a:effectLst>
-            <a:outerShdw blurRad="101600" dist="38100" dir="5400000" algn="bl" rotWithShape="0">
+            <a:outerShdw sx="100000" sy="100000" kx="0" ky="0" algn="bl" rotWithShape="0" blurRad="101600" dist="38100" dir="5400000">
               <a:srgbClr val="000000">
                 <a:alpha val="35000"/>
               </a:srgbClr>
@@ -7625,7 +8036,7 @@
           <a:bodyPr wrap="square" lIns="0" tIns="0" rIns="0" bIns="0" rtlCol="0" anchor="ctr"/>
           <a:lstStyle/>
           <a:p>
-            <a:pPr marL="0" indent="0">
+            <a:pPr indent="0" marL="0">
               <a:buNone/>
             </a:pPr>
             <a:r>
@@ -7664,7 +8075,7 @@
           <a:bodyPr wrap="square" lIns="0" tIns="0" rIns="0" bIns="0" rtlCol="0" anchor="ctr"/>
           <a:lstStyle/>
           <a:p>
-            <a:pPr marL="0" indent="0">
+            <a:pPr indent="0" marL="0">
               <a:buNone/>
             </a:pPr>
             <a:r>
@@ -7703,7 +8114,7 @@
           <a:bodyPr wrap="square" lIns="0" tIns="0" rIns="0" bIns="0" rtlCol="0" anchor="ctr"/>
           <a:lstStyle/>
           <a:p>
-            <a:pPr marL="0" indent="0">
+            <a:pPr indent="0" marL="0">
               <a:lnSpc>
                 <a:spcPct val="120000"/>
               </a:lnSpc>
@@ -7745,20 +8156,13 @@
           </a:solidFill>
           <a:ln/>
           <a:effectLst>
-            <a:outerShdw blurRad="101600" dist="38100" dir="5400000" algn="bl" rotWithShape="0">
+            <a:outerShdw sx="100000" sy="100000" kx="0" ky="0" algn="bl" rotWithShape="0" blurRad="101600" dist="38100" dir="5400000">
               <a:srgbClr val="000000">
                 <a:alpha val="35000"/>
               </a:srgbClr>
             </a:outerShdw>
           </a:effectLst>
         </p:spPr>
-        <p:txBody>
-          <a:bodyPr/>
-          <a:lstStyle/>
-          <a:p>
-            <a:endParaRPr lang="en-IN" dirty="0"/>
-          </a:p>
-        </p:txBody>
       </p:sp>
       <p:sp>
         <p:nvSpPr>
@@ -7781,7 +8185,7 @@
           <a:bodyPr wrap="square" lIns="0" tIns="0" rIns="0" bIns="0" rtlCol="0" anchor="ctr"/>
           <a:lstStyle/>
           <a:p>
-            <a:pPr marL="0" indent="0">
+            <a:pPr indent="0" marL="0">
               <a:buNone/>
             </a:pPr>
             <a:r>
@@ -7820,7 +8224,7 @@
           <a:bodyPr wrap="square" lIns="0" tIns="0" rIns="0" bIns="0" rtlCol="0" anchor="ctr"/>
           <a:lstStyle/>
           <a:p>
-            <a:pPr marL="0" indent="0">
+            <a:pPr indent="0" marL="0">
               <a:buNone/>
             </a:pPr>
             <a:r>
@@ -7859,7 +8263,7 @@
           <a:bodyPr wrap="square" lIns="0" tIns="0" rIns="0" bIns="0" rtlCol="0" anchor="ctr"/>
           <a:lstStyle/>
           <a:p>
-            <a:pPr marL="0" indent="0">
+            <a:pPr indent="0" marL="0">
               <a:lnSpc>
                 <a:spcPct val="120000"/>
               </a:lnSpc>
@@ -7901,7 +8305,7 @@
           </a:solidFill>
           <a:ln/>
           <a:effectLst>
-            <a:outerShdw blurRad="101600" dist="38100" dir="5400000" algn="bl" rotWithShape="0">
+            <a:outerShdw sx="100000" sy="100000" kx="0" ky="0" algn="bl" rotWithShape="0" blurRad="101600" dist="38100" dir="5400000">
               <a:srgbClr val="000000">
                 <a:alpha val="35000"/>
               </a:srgbClr>
@@ -7930,7 +8334,7 @@
           <a:bodyPr wrap="square" lIns="0" tIns="0" rIns="0" bIns="0" rtlCol="0" anchor="ctr"/>
           <a:lstStyle/>
           <a:p>
-            <a:pPr marL="0" indent="0">
+            <a:pPr indent="0" marL="0">
               <a:buNone/>
             </a:pPr>
             <a:r>
@@ -7969,7 +8373,7 @@
           <a:bodyPr wrap="square" lIns="0" tIns="0" rIns="0" bIns="0" rtlCol="0" anchor="ctr"/>
           <a:lstStyle/>
           <a:p>
-            <a:pPr marL="0" indent="0">
+            <a:pPr indent="0" marL="0">
               <a:buNone/>
             </a:pPr>
             <a:r>
@@ -8008,7 +8412,7 @@
           <a:bodyPr wrap="square" lIns="0" tIns="0" rIns="0" bIns="0" rtlCol="0" anchor="ctr"/>
           <a:lstStyle/>
           <a:p>
-            <a:pPr marL="0" indent="0">
+            <a:pPr indent="0" marL="0">
               <a:lnSpc>
                 <a:spcPct val="120000"/>
               </a:lnSpc>
@@ -8050,9 +8454,20 @@
           <a:bodyPr wrap="square" lIns="0" tIns="0" rIns="0" bIns="0" rtlCol="0" anchor="ctr"/>
           <a:lstStyle/>
           <a:p>
-            <a:pPr marL="0" indent="0" algn="l">
-              <a:buNone/>
-            </a:pPr>
+            <a:pPr algn="l" indent="0" marL="0">
+              <a:buNone/>
+            </a:pPr>
+            <a:r>
+              <a:rPr lang="en-US" sz="900" dirty="0">
+                <a:solidFill>
+                  <a:srgbClr val="B0AFD3"/>
+                </a:solidFill>
+                <a:latin typeface="Arial" pitchFamily="34" charset="0"/>
+                <a:ea typeface="Arial" pitchFamily="34" charset="-122"/>
+                <a:cs typeface="Arial" pitchFamily="34" charset="-120"/>
+              </a:rPr>
+              <a:t>EduVision</a:t>
+            </a:r>
             <a:endParaRPr lang="en-US" sz="900" dirty="0"/>
           </a:p>
         </p:txBody>
@@ -8078,7 +8493,7 @@
           <a:bodyPr wrap="square" lIns="0" tIns="0" rIns="0" bIns="0" rtlCol="0" anchor="ctr"/>
           <a:lstStyle/>
           <a:p>
-            <a:pPr marL="0" indent="0" algn="r">
+            <a:pPr algn="r" indent="0" marL="0">
               <a:buNone/>
             </a:pPr>
             <a:r>
@@ -8112,7 +8527,6 @@
         <a:solidFill>
           <a:srgbClr val="1A1F4A"/>
         </a:solidFill>
-        <a:effectLst/>
       </p:bgPr>
     </p:bg>
     <p:spTree>
@@ -8194,11 +8608,11 @@
           <a:bodyPr wrap="square" lIns="0" tIns="0" rIns="0" bIns="0" rtlCol="0" anchor="ctr"/>
           <a:lstStyle/>
           <a:p>
-            <a:pPr marL="0" indent="0">
-              <a:buNone/>
-            </a:pPr>
-            <a:r>
-              <a:rPr lang="en-US" sz="1200" b="1" kern="0" spc="200" dirty="0">
+            <a:pPr indent="0" marL="0">
+              <a:buNone/>
+            </a:pPr>
+            <a:r>
+              <a:rPr lang="en-US" sz="1200" b="1" spc="200" kern="0" dirty="0">
                 <a:solidFill>
                   <a:srgbClr val="2BCA81"/>
                 </a:solidFill>
@@ -8233,7 +8647,7 @@
           <a:bodyPr wrap="square" lIns="0" tIns="0" rIns="0" bIns="0" rtlCol="0" anchor="ctr"/>
           <a:lstStyle/>
           <a:p>
-            <a:pPr marL="0" indent="0">
+            <a:pPr indent="0" marL="0">
               <a:buNone/>
             </a:pPr>
             <a:r>
@@ -8294,7 +8708,7 @@
           <a:bodyPr wrap="square" lIns="0" tIns="0" rIns="0" bIns="0" rtlCol="0" anchor="ctr"/>
           <a:lstStyle/>
           <a:p>
-            <a:pPr marL="0" indent="0" algn="ctr">
+            <a:pPr algn="ctr" indent="0" marL="0">
               <a:buNone/>
             </a:pPr>
             <a:r>
@@ -8311,7 +8725,7 @@
             <a:endParaRPr lang="en-US" sz="1050" dirty="0"/>
           </a:p>
           <a:p>
-            <a:pPr marL="0" indent="0" algn="ctr">
+            <a:pPr algn="ctr" indent="0" marL="0">
               <a:buNone/>
             </a:pPr>
             <a:r>
@@ -8350,7 +8764,7 @@
           <a:bodyPr wrap="square" lIns="0" tIns="0" rIns="0" bIns="0" rtlCol="0" anchor="ctr"/>
           <a:lstStyle/>
           <a:p>
-            <a:pPr marL="0" indent="0" algn="ctr">
+            <a:pPr algn="ctr" indent="0" marL="0">
               <a:buNone/>
             </a:pPr>
             <a:r>
@@ -8411,7 +8825,7 @@
           <a:bodyPr wrap="square" lIns="0" tIns="0" rIns="0" bIns="0" rtlCol="0" anchor="ctr"/>
           <a:lstStyle/>
           <a:p>
-            <a:pPr marL="0" indent="0" algn="ctr">
+            <a:pPr algn="ctr" indent="0" marL="0">
               <a:buNone/>
             </a:pPr>
             <a:r>
@@ -8428,7 +8842,7 @@
             <a:endParaRPr lang="en-US" sz="1050" dirty="0"/>
           </a:p>
           <a:p>
-            <a:pPr marL="0" indent="0" algn="ctr">
+            <a:pPr algn="ctr" indent="0" marL="0">
               <a:buNone/>
             </a:pPr>
             <a:r>
@@ -8467,7 +8881,7 @@
           <a:bodyPr wrap="square" lIns="0" tIns="0" rIns="0" bIns="0" rtlCol="0" anchor="ctr"/>
           <a:lstStyle/>
           <a:p>
-            <a:pPr marL="0" indent="0" algn="ctr">
+            <a:pPr algn="ctr" indent="0" marL="0">
               <a:buNone/>
             </a:pPr>
             <a:r>
@@ -8528,7 +8942,7 @@
           <a:bodyPr wrap="square" lIns="0" tIns="0" rIns="0" bIns="0" rtlCol="0" anchor="ctr"/>
           <a:lstStyle/>
           <a:p>
-            <a:pPr marL="0" indent="0" algn="ctr">
+            <a:pPr algn="ctr" indent="0" marL="0">
               <a:buNone/>
             </a:pPr>
             <a:r>
@@ -8545,7 +8959,7 @@
             <a:endParaRPr lang="en-US" sz="1050" dirty="0"/>
           </a:p>
           <a:p>
-            <a:pPr marL="0" indent="0" algn="ctr">
+            <a:pPr algn="ctr" indent="0" marL="0">
               <a:buNone/>
             </a:pPr>
             <a:r>
@@ -8584,7 +8998,7 @@
           <a:bodyPr wrap="square" lIns="0" tIns="0" rIns="0" bIns="0" rtlCol="0" anchor="ctr"/>
           <a:lstStyle/>
           <a:p>
-            <a:pPr marL="0" indent="0" algn="ctr">
+            <a:pPr algn="ctr" indent="0" marL="0">
               <a:buNone/>
             </a:pPr>
             <a:r>
@@ -8645,7 +9059,7 @@
           <a:bodyPr wrap="square" lIns="0" tIns="0" rIns="0" bIns="0" rtlCol="0" anchor="ctr"/>
           <a:lstStyle/>
           <a:p>
-            <a:pPr marL="0" indent="0" algn="ctr">
+            <a:pPr algn="ctr" indent="0" marL="0">
               <a:buNone/>
             </a:pPr>
             <a:r>
@@ -8662,7 +9076,7 @@
             <a:endParaRPr lang="en-US" sz="1050" dirty="0"/>
           </a:p>
           <a:p>
-            <a:pPr marL="0" indent="0" algn="ctr">
+            <a:pPr algn="ctr" indent="0" marL="0">
               <a:buNone/>
             </a:pPr>
             <a:r>
@@ -8701,7 +9115,7 @@
           <a:bodyPr wrap="square" lIns="0" tIns="0" rIns="0" bIns="0" rtlCol="0" anchor="ctr"/>
           <a:lstStyle/>
           <a:p>
-            <a:pPr marL="0" indent="0" algn="ctr">
+            <a:pPr algn="ctr" indent="0" marL="0">
               <a:buNone/>
             </a:pPr>
             <a:r>
@@ -8762,7 +9176,7 @@
           <a:bodyPr wrap="square" lIns="0" tIns="0" rIns="0" bIns="0" rtlCol="0" anchor="ctr"/>
           <a:lstStyle/>
           <a:p>
-            <a:pPr marL="0" indent="0" algn="ctr">
+            <a:pPr algn="ctr" indent="0" marL="0">
               <a:buNone/>
             </a:pPr>
             <a:r>
@@ -8779,7 +9193,7 @@
             <a:endParaRPr lang="en-US" sz="1050" dirty="0"/>
           </a:p>
           <a:p>
-            <a:pPr marL="0" indent="0" algn="ctr">
+            <a:pPr algn="ctr" indent="0" marL="0">
               <a:buNone/>
             </a:pPr>
             <a:r>
@@ -8818,7 +9232,7 @@
           <a:bodyPr wrap="square" lIns="0" tIns="0" rIns="0" bIns="0" rtlCol="0" anchor="ctr"/>
           <a:lstStyle/>
           <a:p>
-            <a:pPr marL="0" indent="0" algn="ctr">
+            <a:pPr algn="ctr" indent="0" marL="0">
               <a:buNone/>
             </a:pPr>
             <a:r>
@@ -8879,7 +9293,7 @@
           <a:bodyPr wrap="square" lIns="0" tIns="0" rIns="0" bIns="0" rtlCol="0" anchor="ctr"/>
           <a:lstStyle/>
           <a:p>
-            <a:pPr marL="0" indent="0" algn="ctr">
+            <a:pPr algn="ctr" indent="0" marL="0">
               <a:buNone/>
             </a:pPr>
             <a:r>
@@ -8896,7 +9310,7 @@
             <a:endParaRPr lang="en-US" sz="1050" dirty="0"/>
           </a:p>
           <a:p>
-            <a:pPr marL="0" indent="0" algn="ctr">
+            <a:pPr algn="ctr" indent="0" marL="0">
               <a:buNone/>
             </a:pPr>
             <a:r>
@@ -8935,7 +9349,7 @@
           </a:solidFill>
           <a:ln/>
           <a:effectLst>
-            <a:outerShdw blurRad="101600" dist="38100" dir="5400000" algn="bl" rotWithShape="0">
+            <a:outerShdw sx="100000" sy="100000" kx="0" ky="0" algn="bl" rotWithShape="0" blurRad="101600" dist="38100" dir="5400000">
               <a:srgbClr val="000000">
                 <a:alpha val="35000"/>
               </a:srgbClr>
@@ -8984,7 +9398,7 @@
           <a:bodyPr wrap="square" lIns="0" tIns="0" rIns="0" bIns="0" rtlCol="0" anchor="ctr"/>
           <a:lstStyle/>
           <a:p>
-            <a:pPr marL="0" indent="0">
+            <a:pPr indent="0" marL="0">
               <a:buNone/>
             </a:pPr>
             <a:r>
@@ -9023,7 +9437,7 @@
           <a:bodyPr wrap="square" lIns="0" tIns="0" rIns="0" bIns="0" rtlCol="0" anchor="ctr"/>
           <a:lstStyle/>
           <a:p>
-            <a:pPr marL="0" indent="0">
+            <a:pPr indent="0" marL="0">
               <a:lnSpc>
                 <a:spcPct val="120000"/>
               </a:lnSpc>
@@ -9065,7 +9479,7 @@
           </a:solidFill>
           <a:ln/>
           <a:effectLst>
-            <a:outerShdw blurRad="101600" dist="38100" dir="5400000" algn="bl" rotWithShape="0">
+            <a:outerShdw sx="100000" sy="100000" kx="0" ky="0" algn="bl" rotWithShape="0" blurRad="101600" dist="38100" dir="5400000">
               <a:srgbClr val="000000">
                 <a:alpha val="35000"/>
               </a:srgbClr>
@@ -9114,7 +9528,7 @@
           <a:bodyPr wrap="square" lIns="0" tIns="0" rIns="0" bIns="0" rtlCol="0" anchor="ctr"/>
           <a:lstStyle/>
           <a:p>
-            <a:pPr marL="0" indent="0">
+            <a:pPr indent="0" marL="0">
               <a:buNone/>
             </a:pPr>
             <a:r>
@@ -9153,7 +9567,7 @@
           <a:bodyPr wrap="square" lIns="0" tIns="0" rIns="0" bIns="0" rtlCol="0" anchor="ctr"/>
           <a:lstStyle/>
           <a:p>
-            <a:pPr marL="0" indent="0">
+            <a:pPr indent="0" marL="0">
               <a:lnSpc>
                 <a:spcPct val="120000"/>
               </a:lnSpc>
@@ -9195,7 +9609,7 @@
           </a:solidFill>
           <a:ln/>
           <a:effectLst>
-            <a:outerShdw blurRad="101600" dist="38100" dir="5400000" algn="bl" rotWithShape="0">
+            <a:outerShdw sx="100000" sy="100000" kx="0" ky="0" algn="bl" rotWithShape="0" blurRad="101600" dist="38100" dir="5400000">
               <a:srgbClr val="000000">
                 <a:alpha val="35000"/>
               </a:srgbClr>
@@ -9244,7 +9658,7 @@
           <a:bodyPr wrap="square" lIns="0" tIns="0" rIns="0" bIns="0" rtlCol="0" anchor="ctr"/>
           <a:lstStyle/>
           <a:p>
-            <a:pPr marL="0" indent="0">
+            <a:pPr indent="0" marL="0">
               <a:buNone/>
             </a:pPr>
             <a:r>
@@ -9283,7 +9697,7 @@
           <a:bodyPr wrap="square" lIns="0" tIns="0" rIns="0" bIns="0" rtlCol="0" anchor="ctr"/>
           <a:lstStyle/>
           <a:p>
-            <a:pPr marL="0" indent="0">
+            <a:pPr indent="0" marL="0">
               <a:lnSpc>
                 <a:spcPct val="120000"/>
               </a:lnSpc>
@@ -9325,9 +9739,20 @@
           <a:bodyPr wrap="square" lIns="0" tIns="0" rIns="0" bIns="0" rtlCol="0" anchor="ctr"/>
           <a:lstStyle/>
           <a:p>
-            <a:pPr marL="0" indent="0" algn="l">
-              <a:buNone/>
-            </a:pPr>
+            <a:pPr algn="l" indent="0" marL="0">
+              <a:buNone/>
+            </a:pPr>
+            <a:r>
+              <a:rPr lang="en-US" sz="900" dirty="0">
+                <a:solidFill>
+                  <a:srgbClr val="B0AFD3"/>
+                </a:solidFill>
+                <a:latin typeface="Arial" pitchFamily="34" charset="0"/>
+                <a:ea typeface="Arial" pitchFamily="34" charset="-122"/>
+                <a:cs typeface="Arial" pitchFamily="34" charset="-120"/>
+              </a:rPr>
+              <a:t>EduVision</a:t>
+            </a:r>
             <a:endParaRPr lang="en-US" sz="900" dirty="0"/>
           </a:p>
         </p:txBody>
@@ -9353,7 +9778,7 @@
           <a:bodyPr wrap="square" lIns="0" tIns="0" rIns="0" bIns="0" rtlCol="0" anchor="ctr"/>
           <a:lstStyle/>
           <a:p>
-            <a:pPr marL="0" indent="0" algn="r">
+            <a:pPr algn="r" indent="0" marL="0">
               <a:buNone/>
             </a:pPr>
             <a:r>
@@ -9387,7 +9812,6 @@
         <a:solidFill>
           <a:srgbClr val="030733"/>
         </a:solidFill>
-        <a:effectLst/>
       </p:bgPr>
     </p:bg>
     <p:spTree>
@@ -9469,11 +9893,11 @@
           <a:bodyPr wrap="square" lIns="0" tIns="0" rIns="0" bIns="0" rtlCol="0" anchor="ctr"/>
           <a:lstStyle/>
           <a:p>
-            <a:pPr marL="0" indent="0">
-              <a:buNone/>
-            </a:pPr>
-            <a:r>
-              <a:rPr lang="en-US" sz="1200" b="1" kern="0" spc="200" dirty="0">
+            <a:pPr indent="0" marL="0">
+              <a:buNone/>
+            </a:pPr>
+            <a:r>
+              <a:rPr lang="en-US" sz="1200" b="1" spc="200" kern="0" dirty="0">
                 <a:solidFill>
                   <a:srgbClr val="2BCA81"/>
                 </a:solidFill>
@@ -9508,7 +9932,7 @@
           <a:bodyPr wrap="square" lIns="0" tIns="0" rIns="0" bIns="0" rtlCol="0" anchor="ctr"/>
           <a:lstStyle/>
           <a:p>
-            <a:pPr marL="0" indent="0">
+            <a:pPr indent="0" marL="0">
               <a:buNone/>
             </a:pPr>
             <a:r>
@@ -9547,7 +9971,7 @@
           </a:solidFill>
           <a:ln/>
           <a:effectLst>
-            <a:outerShdw blurRad="101600" dist="38100" dir="5400000" algn="bl" rotWithShape="0">
+            <a:outerShdw sx="100000" sy="100000" kx="0" ky="0" algn="bl" rotWithShape="0" blurRad="101600" dist="38100" dir="5400000">
               <a:srgbClr val="000000">
                 <a:alpha val="35000"/>
               </a:srgbClr>
@@ -9576,7 +10000,7 @@
           <a:bodyPr wrap="square" lIns="0" tIns="0" rIns="0" bIns="0" rtlCol="0" anchor="ctr"/>
           <a:lstStyle/>
           <a:p>
-            <a:pPr marL="0" indent="0">
+            <a:pPr indent="0" marL="0">
               <a:buNone/>
             </a:pPr>
             <a:r>
@@ -9635,7 +10059,7 @@
           <a:bodyPr wrap="square" lIns="0" tIns="0" rIns="0" bIns="0" rtlCol="0" anchor="ctr"/>
           <a:lstStyle/>
           <a:p>
-            <a:pPr marL="0" indent="0">
+            <a:pPr indent="0" marL="0">
               <a:buNone/>
             </a:pPr>
             <a:r>
@@ -9674,7 +10098,7 @@
           <a:bodyPr wrap="square" lIns="0" tIns="0" rIns="0" bIns="0" rtlCol="0" anchor="ctr"/>
           <a:lstStyle/>
           <a:p>
-            <a:pPr marL="0" indent="0">
+            <a:pPr indent="0" marL="0">
               <a:lnSpc>
                 <a:spcPct val="120000"/>
               </a:lnSpc>
@@ -9736,7 +10160,7 @@
           <a:bodyPr wrap="square" lIns="0" tIns="0" rIns="0" bIns="0" rtlCol="0" anchor="ctr"/>
           <a:lstStyle/>
           <a:p>
-            <a:pPr marL="0" indent="0">
+            <a:pPr indent="0" marL="0">
               <a:buNone/>
             </a:pPr>
             <a:r>
@@ -9775,7 +10199,7 @@
           <a:bodyPr wrap="square" lIns="0" tIns="0" rIns="0" bIns="0" rtlCol="0" anchor="ctr"/>
           <a:lstStyle/>
           <a:p>
-            <a:pPr marL="0" indent="0">
+            <a:pPr indent="0" marL="0">
               <a:lnSpc>
                 <a:spcPct val="120000"/>
               </a:lnSpc>
@@ -9817,7 +10241,7 @@
           </a:solidFill>
           <a:ln/>
           <a:effectLst>
-            <a:outerShdw blurRad="101600" dist="38100" dir="5400000" algn="bl" rotWithShape="0">
+            <a:outerShdw sx="100000" sy="100000" kx="0" ky="0" algn="bl" rotWithShape="0" blurRad="101600" dist="38100" dir="5400000">
               <a:srgbClr val="000000">
                 <a:alpha val="35000"/>
               </a:srgbClr>
@@ -9846,7 +10270,7 @@
           <a:bodyPr wrap="square" lIns="0" tIns="0" rIns="0" bIns="0" rtlCol="0" anchor="ctr"/>
           <a:lstStyle/>
           <a:p>
-            <a:pPr marL="0" indent="0">
+            <a:pPr indent="0" marL="0">
               <a:buNone/>
             </a:pPr>
             <a:r>
@@ -9885,7 +10309,7 @@
           <a:bodyPr wrap="square" lIns="0" tIns="0" rIns="0" bIns="0" rtlCol="0" anchor="ctr"/>
           <a:lstStyle/>
           <a:p>
-            <a:pPr marL="0" indent="0">
+            <a:pPr indent="0" marL="0">
               <a:lnSpc>
                 <a:spcPct val="120000"/>
               </a:lnSpc>
@@ -9927,7 +10351,7 @@
           </a:solidFill>
           <a:ln/>
           <a:effectLst>
-            <a:outerShdw blurRad="101600" dist="38100" dir="5400000" algn="bl" rotWithShape="0">
+            <a:outerShdw sx="100000" sy="100000" kx="0" ky="0" algn="bl" rotWithShape="0" blurRad="101600" dist="38100" dir="5400000">
               <a:srgbClr val="000000">
                 <a:alpha val="35000"/>
               </a:srgbClr>
@@ -9956,7 +10380,7 @@
           <a:bodyPr wrap="square" lIns="0" tIns="0" rIns="0" bIns="0" rtlCol="0" anchor="ctr"/>
           <a:lstStyle/>
           <a:p>
-            <a:pPr marL="0" indent="0">
+            <a:pPr indent="0" marL="0">
               <a:buNone/>
             </a:pPr>
             <a:r>
@@ -9995,7 +10419,7 @@
           <a:bodyPr wrap="square" lIns="0" tIns="0" rIns="0" bIns="0" rtlCol="0" anchor="ctr"/>
           <a:lstStyle/>
           <a:p>
-            <a:pPr marL="0" indent="0">
+            <a:pPr indent="0" marL="0">
               <a:lnSpc>
                 <a:spcPct val="120000"/>
               </a:lnSpc>
@@ -10037,9 +10461,20 @@
           <a:bodyPr wrap="square" lIns="0" tIns="0" rIns="0" bIns="0" rtlCol="0" anchor="ctr"/>
           <a:lstStyle/>
           <a:p>
-            <a:pPr marL="0" indent="0" algn="l">
-              <a:buNone/>
-            </a:pPr>
+            <a:pPr algn="l" indent="0" marL="0">
+              <a:buNone/>
+            </a:pPr>
+            <a:r>
+              <a:rPr lang="en-US" sz="900" dirty="0">
+                <a:solidFill>
+                  <a:srgbClr val="B0AFD3"/>
+                </a:solidFill>
+                <a:latin typeface="Arial" pitchFamily="34" charset="0"/>
+                <a:ea typeface="Arial" pitchFamily="34" charset="-122"/>
+                <a:cs typeface="Arial" pitchFamily="34" charset="-120"/>
+              </a:rPr>
+              <a:t>EduVision</a:t>
+            </a:r>
             <a:endParaRPr lang="en-US" sz="900" dirty="0"/>
           </a:p>
         </p:txBody>
@@ -10065,7 +10500,7 @@
           <a:bodyPr wrap="square" lIns="0" tIns="0" rIns="0" bIns="0" rtlCol="0" anchor="ctr"/>
           <a:lstStyle/>
           <a:p>
-            <a:pPr marL="0" indent="0" algn="r">
+            <a:pPr algn="r" indent="0" marL="0">
               <a:buNone/>
             </a:pPr>
             <a:r>
@@ -10099,7 +10534,6 @@
         <a:solidFill>
           <a:srgbClr val="1A1F4A"/>
         </a:solidFill>
-        <a:effectLst/>
       </p:bgPr>
     </p:bg>
     <p:spTree>
@@ -10181,11 +10615,11 @@
           <a:bodyPr wrap="square" lIns="0" tIns="0" rIns="0" bIns="0" rtlCol="0" anchor="ctr"/>
           <a:lstStyle/>
           <a:p>
-            <a:pPr marL="0" indent="0">
-              <a:buNone/>
-            </a:pPr>
-            <a:r>
-              <a:rPr lang="en-US" sz="1200" b="1" kern="0" spc="200" dirty="0">
+            <a:pPr indent="0" marL="0">
+              <a:buNone/>
+            </a:pPr>
+            <a:r>
+              <a:rPr lang="en-US" sz="1200" b="1" spc="200" kern="0" dirty="0">
                 <a:solidFill>
                   <a:srgbClr val="2BCA81"/>
                 </a:solidFill>
@@ -10220,7 +10654,7 @@
           <a:bodyPr wrap="square" lIns="0" tIns="0" rIns="0" bIns="0" rtlCol="0" anchor="ctr"/>
           <a:lstStyle/>
           <a:p>
-            <a:pPr marL="0" indent="0">
+            <a:pPr indent="0" marL="0">
               <a:buNone/>
             </a:pPr>
             <a:r>
@@ -10259,7 +10693,7 @@
           </a:solidFill>
           <a:ln/>
           <a:effectLst>
-            <a:outerShdw blurRad="101600" dist="38100" dir="5400000" algn="bl" rotWithShape="0">
+            <a:outerShdw sx="100000" sy="100000" kx="0" ky="0" algn="bl" rotWithShape="0" blurRad="101600" dist="38100" dir="5400000">
               <a:srgbClr val="000000">
                 <a:alpha val="35000"/>
               </a:srgbClr>
@@ -10288,7 +10722,7 @@
           <a:bodyPr wrap="square" lIns="0" tIns="0" rIns="0" bIns="0" rtlCol="0" anchor="ctr"/>
           <a:lstStyle/>
           <a:p>
-            <a:pPr marL="0" indent="0" algn="ctr">
+            <a:pPr algn="ctr" indent="0" marL="0">
               <a:buNone/>
             </a:pPr>
             <a:r>
@@ -10327,7 +10761,7 @@
           <a:bodyPr wrap="square" lIns="0" tIns="0" rIns="0" bIns="0" rtlCol="0" anchor="ctr"/>
           <a:lstStyle/>
           <a:p>
-            <a:pPr marL="0" indent="0" algn="ctr">
+            <a:pPr algn="ctr" indent="0" marL="0">
               <a:buNone/>
             </a:pPr>
             <a:r>
@@ -10366,7 +10800,7 @@
           </a:solidFill>
           <a:ln/>
           <a:effectLst>
-            <a:outerShdw blurRad="101600" dist="38100" dir="5400000" algn="bl" rotWithShape="0">
+            <a:outerShdw sx="100000" sy="100000" kx="0" ky="0" algn="bl" rotWithShape="0" blurRad="101600" dist="38100" dir="5400000">
               <a:srgbClr val="000000">
                 <a:alpha val="35000"/>
               </a:srgbClr>
@@ -10395,7 +10829,7 @@
           <a:bodyPr wrap="square" lIns="0" tIns="0" rIns="0" bIns="0" rtlCol="0" anchor="ctr"/>
           <a:lstStyle/>
           <a:p>
-            <a:pPr marL="0" indent="0" algn="ctr">
+            <a:pPr algn="ctr" indent="0" marL="0">
               <a:buNone/>
             </a:pPr>
             <a:r>
@@ -10434,7 +10868,7 @@
           <a:bodyPr wrap="square" lIns="0" tIns="0" rIns="0" bIns="0" rtlCol="0" anchor="ctr"/>
           <a:lstStyle/>
           <a:p>
-            <a:pPr marL="0" indent="0" algn="ctr">
+            <a:pPr algn="ctr" indent="0" marL="0">
               <a:buNone/>
             </a:pPr>
             <a:r>
@@ -10473,7 +10907,7 @@
           </a:solidFill>
           <a:ln/>
           <a:effectLst>
-            <a:outerShdw blurRad="101600" dist="38100" dir="5400000" algn="bl" rotWithShape="0">
+            <a:outerShdw sx="100000" sy="100000" kx="0" ky="0" algn="bl" rotWithShape="0" blurRad="101600" dist="38100" dir="5400000">
               <a:srgbClr val="000000">
                 <a:alpha val="35000"/>
               </a:srgbClr>
@@ -10502,7 +10936,7 @@
           <a:bodyPr wrap="square" lIns="0" tIns="0" rIns="0" bIns="0" rtlCol="0" anchor="ctr"/>
           <a:lstStyle/>
           <a:p>
-            <a:pPr marL="0" indent="0" algn="ctr">
+            <a:pPr algn="ctr" indent="0" marL="0">
               <a:buNone/>
             </a:pPr>
             <a:r>
@@ -10541,7 +10975,7 @@
           <a:bodyPr wrap="square" lIns="0" tIns="0" rIns="0" bIns="0" rtlCol="0" anchor="ctr"/>
           <a:lstStyle/>
           <a:p>
-            <a:pPr marL="0" indent="0" algn="ctr">
+            <a:pPr algn="ctr" indent="0" marL="0">
               <a:buNone/>
             </a:pPr>
             <a:r>
@@ -10580,7 +11014,7 @@
           </a:solidFill>
           <a:ln/>
           <a:effectLst>
-            <a:outerShdw blurRad="101600" dist="38100" dir="5400000" algn="bl" rotWithShape="0">
+            <a:outerShdw sx="100000" sy="100000" kx="0" ky="0" algn="bl" rotWithShape="0" blurRad="101600" dist="38100" dir="5400000">
               <a:srgbClr val="000000">
                 <a:alpha val="35000"/>
               </a:srgbClr>
@@ -10609,7 +11043,7 @@
           <a:bodyPr wrap="square" lIns="0" tIns="0" rIns="0" bIns="0" rtlCol="0" anchor="ctr"/>
           <a:lstStyle/>
           <a:p>
-            <a:pPr marL="0" indent="0" algn="ctr">
+            <a:pPr algn="ctr" indent="0" marL="0">
               <a:buNone/>
             </a:pPr>
             <a:r>
@@ -10648,7 +11082,7 @@
           <a:bodyPr wrap="square" lIns="0" tIns="0" rIns="0" bIns="0" rtlCol="0" anchor="ctr"/>
           <a:lstStyle/>
           <a:p>
-            <a:pPr marL="0" indent="0" algn="ctr">
+            <a:pPr algn="ctr" indent="0" marL="0">
               <a:buNone/>
             </a:pPr>
             <a:r>
@@ -10687,7 +11121,7 @@
           </a:solidFill>
           <a:ln/>
           <a:effectLst>
-            <a:outerShdw blurRad="101600" dist="38100" dir="5400000" algn="bl" rotWithShape="0">
+            <a:outerShdw sx="100000" sy="100000" kx="0" ky="0" algn="bl" rotWithShape="0" blurRad="101600" dist="38100" dir="5400000">
               <a:srgbClr val="000000">
                 <a:alpha val="35000"/>
               </a:srgbClr>
@@ -10716,7 +11150,7 @@
           <a:bodyPr wrap="square" lIns="0" tIns="0" rIns="0" bIns="0" rtlCol="0" anchor="ctr"/>
           <a:lstStyle/>
           <a:p>
-            <a:pPr marL="0" indent="0" algn="ctr">
+            <a:pPr algn="ctr" indent="0" marL="0">
               <a:buNone/>
             </a:pPr>
             <a:r>
@@ -10755,7 +11189,7 @@
           <a:bodyPr wrap="square" lIns="0" tIns="0" rIns="0" bIns="0" rtlCol="0" anchor="ctr"/>
           <a:lstStyle/>
           <a:p>
-            <a:pPr marL="0" indent="0" algn="ctr">
+            <a:pPr algn="ctr" indent="0" marL="0">
               <a:buNone/>
             </a:pPr>
             <a:r>
@@ -10794,7 +11228,7 @@
           </a:solidFill>
           <a:ln/>
           <a:effectLst>
-            <a:outerShdw blurRad="101600" dist="38100" dir="5400000" algn="bl" rotWithShape="0">
+            <a:outerShdw sx="100000" sy="100000" kx="0" ky="0" algn="bl" rotWithShape="0" blurRad="101600" dist="38100" dir="5400000">
               <a:srgbClr val="000000">
                 <a:alpha val="35000"/>
               </a:srgbClr>
@@ -10823,7 +11257,7 @@
           <a:bodyPr wrap="square" lIns="0" tIns="0" rIns="0" bIns="0" rtlCol="0" anchor="ctr"/>
           <a:lstStyle/>
           <a:p>
-            <a:pPr marL="0" indent="0" algn="ctr">
+            <a:pPr algn="ctr" indent="0" marL="0">
               <a:buNone/>
             </a:pPr>
             <a:r>
@@ -10862,7 +11296,7 @@
           <a:bodyPr wrap="square" lIns="0" tIns="0" rIns="0" bIns="0" rtlCol="0" anchor="ctr"/>
           <a:lstStyle/>
           <a:p>
-            <a:pPr marL="0" indent="0" algn="ctr">
+            <a:pPr algn="ctr" indent="0" marL="0">
               <a:buNone/>
             </a:pPr>
             <a:r>
@@ -10877,6 +11311,45 @@
               <a:t>Avg. Faculty-to-Student Ratio</a:t>
             </a:r>
             <a:endParaRPr lang="en-US" sz="1250" dirty="0"/>
+          </a:p>
+        </p:txBody>
+      </p:sp>
+      <p:sp>
+        <p:nvSpPr>
+          <p:cNvPr id="24" name="Text 22"/>
+          <p:cNvSpPr/>
+          <p:nvPr/>
+        </p:nvSpPr>
+        <p:spPr>
+          <a:xfrm>
+            <a:off x="457200" y="6537960"/>
+            <a:ext cx="5486400" cy="274320"/>
+          </a:xfrm>
+          <a:prstGeom prst="rect">
+            <a:avLst/>
+          </a:prstGeom>
+          <a:noFill/>
+          <a:ln/>
+        </p:spPr>
+        <p:txBody>
+          <a:bodyPr wrap="square" lIns="0" tIns="0" rIns="0" bIns="0" rtlCol="0" anchor="ctr"/>
+          <a:lstStyle/>
+          <a:p>
+            <a:pPr algn="l" indent="0" marL="0">
+              <a:buNone/>
+            </a:pPr>
+            <a:r>
+              <a:rPr lang="en-US" sz="900" dirty="0">
+                <a:solidFill>
+                  <a:srgbClr val="B0AFD3"/>
+                </a:solidFill>
+                <a:latin typeface="Arial" pitchFamily="34" charset="0"/>
+                <a:ea typeface="Arial" pitchFamily="34" charset="-122"/>
+                <a:cs typeface="Arial" pitchFamily="34" charset="-120"/>
+              </a:rPr>
+              <a:t>EduVision</a:t>
+            </a:r>
+            <a:endParaRPr lang="en-US" sz="900" dirty="0"/>
           </a:p>
         </p:txBody>
       </p:sp>
@@ -10901,7 +11374,7 @@
           <a:bodyPr wrap="square" lIns="0" tIns="0" rIns="0" bIns="0" rtlCol="0" anchor="ctr"/>
           <a:lstStyle/>
           <a:p>
-            <a:pPr marL="0" indent="0" algn="r">
+            <a:pPr algn="r" indent="0" marL="0">
               <a:buNone/>
             </a:pPr>
             <a:r>
@@ -10935,7 +11408,6 @@
         <a:solidFill>
           <a:srgbClr val="030733"/>
         </a:solidFill>
-        <a:effectLst/>
       </p:bgPr>
     </p:bg>
     <p:spTree>
@@ -10973,11 +11445,11 @@
           <a:bodyPr wrap="square" lIns="0" tIns="0" rIns="0" bIns="0" rtlCol="0" anchor="ctr"/>
           <a:lstStyle/>
           <a:p>
-            <a:pPr marL="0" indent="0">
-              <a:buNone/>
-            </a:pPr>
-            <a:r>
-              <a:rPr lang="en-US" sz="1200" b="1" kern="0" spc="200" dirty="0">
+            <a:pPr indent="0" marL="0">
+              <a:buNone/>
+            </a:pPr>
+            <a:r>
+              <a:rPr lang="en-US" sz="1200" b="1" spc="200" kern="0" dirty="0">
                 <a:solidFill>
                   <a:srgbClr val="2BCA81"/>
                 </a:solidFill>
@@ -11012,7 +11484,7 @@
           <a:bodyPr wrap="square" lIns="0" tIns="0" rIns="0" bIns="0" rtlCol="0" anchor="ctr"/>
           <a:lstStyle/>
           <a:p>
-            <a:pPr marL="0" indent="0">
+            <a:pPr indent="0" marL="0">
               <a:buNone/>
             </a:pPr>
             <a:r>
@@ -11059,14 +11531,14 @@
       </p:sp>
       <p:pic>
         <p:nvPicPr>
-          <p:cNvPr id="5" name="Image 0" descr="assets/Home.png"/>
+          <p:cNvPr id="5" name="Image 0" descr="assets/Home.png">    </p:cNvPr>
           <p:cNvPicPr>
             <a:picLocks noChangeAspect="1"/>
           </p:cNvPicPr>
           <p:nvPr/>
         </p:nvPicPr>
         <p:blipFill>
-          <a:blip r:embed="rId3"/>
+          <a:blip r:embed="rId1"/>
           <a:stretch>
             <a:fillRect/>
           </a:stretch>
@@ -11102,7 +11574,7 @@
           <a:bodyPr wrap="square" lIns="0" tIns="0" rIns="0" bIns="0" rtlCol="0" anchor="ctr"/>
           <a:lstStyle/>
           <a:p>
-            <a:pPr marL="0" indent="0">
+            <a:pPr indent="0" marL="0">
               <a:buNone/>
             </a:pPr>
             <a:r>
@@ -11247,7 +11719,7 @@
           <a:bodyPr wrap="square" lIns="0" tIns="0" rIns="0" bIns="0" rtlCol="0" anchor="ctr"/>
           <a:lstStyle/>
           <a:p>
-            <a:pPr marL="0" indent="0">
+            <a:pPr indent="0" marL="0">
               <a:buNone/>
             </a:pPr>
             <a:r>
@@ -11262,6 +11734,45 @@
               <a:t>Actual Tableau dashboard from the completed EduVision project.</a:t>
             </a:r>
             <a:endParaRPr lang="en-US" sz="950" dirty="0"/>
+          </a:p>
+        </p:txBody>
+      </p:sp>
+      <p:sp>
+        <p:nvSpPr>
+          <p:cNvPr id="9" name="Text 6"/>
+          <p:cNvSpPr/>
+          <p:nvPr/>
+        </p:nvSpPr>
+        <p:spPr>
+          <a:xfrm>
+            <a:off x="457200" y="6537960"/>
+            <a:ext cx="5486400" cy="274320"/>
+          </a:xfrm>
+          <a:prstGeom prst="rect">
+            <a:avLst/>
+          </a:prstGeom>
+          <a:noFill/>
+          <a:ln/>
+        </p:spPr>
+        <p:txBody>
+          <a:bodyPr wrap="square" lIns="0" tIns="0" rIns="0" bIns="0" rtlCol="0" anchor="ctr"/>
+          <a:lstStyle/>
+          <a:p>
+            <a:pPr algn="l" indent="0" marL="0">
+              <a:buNone/>
+            </a:pPr>
+            <a:r>
+              <a:rPr lang="en-US" sz="900" dirty="0">
+                <a:solidFill>
+                  <a:srgbClr val="B0AFD3"/>
+                </a:solidFill>
+                <a:latin typeface="Arial" pitchFamily="34" charset="0"/>
+                <a:ea typeface="Arial" pitchFamily="34" charset="-122"/>
+                <a:cs typeface="Arial" pitchFamily="34" charset="-120"/>
+              </a:rPr>
+              <a:t>EduVision</a:t>
+            </a:r>
+            <a:endParaRPr lang="en-US" sz="900" dirty="0"/>
           </a:p>
         </p:txBody>
       </p:sp>
@@ -11286,7 +11797,7 @@
           <a:bodyPr wrap="square" lIns="0" tIns="0" rIns="0" bIns="0" rtlCol="0" anchor="ctr"/>
           <a:lstStyle/>
           <a:p>
-            <a:pPr marL="0" indent="0" algn="r">
+            <a:pPr algn="r" indent="0" marL="0">
               <a:buNone/>
             </a:pPr>
             <a:r>
@@ -11320,7 +11831,6 @@
         <a:solidFill>
           <a:srgbClr val="030733"/>
         </a:solidFill>
-        <a:effectLst/>
       </p:bgPr>
     </p:bg>
     <p:spTree>
@@ -11358,11 +11868,11 @@
           <a:bodyPr wrap="square" lIns="0" tIns="0" rIns="0" bIns="0" rtlCol="0" anchor="ctr"/>
           <a:lstStyle/>
           <a:p>
-            <a:pPr marL="0" indent="0">
-              <a:buNone/>
-            </a:pPr>
-            <a:r>
-              <a:rPr lang="en-US" sz="1200" b="1" kern="0" spc="200" dirty="0">
+            <a:pPr indent="0" marL="0">
+              <a:buNone/>
+            </a:pPr>
+            <a:r>
+              <a:rPr lang="en-US" sz="1200" b="1" spc="200" kern="0" dirty="0">
                 <a:solidFill>
                   <a:srgbClr val="2BCA81"/>
                 </a:solidFill>
@@ -11397,7 +11907,7 @@
           <a:bodyPr wrap="square" lIns="0" tIns="0" rIns="0" bIns="0" rtlCol="0" anchor="ctr"/>
           <a:lstStyle/>
           <a:p>
-            <a:pPr marL="0" indent="0">
+            <a:pPr indent="0" marL="0">
               <a:buNone/>
             </a:pPr>
             <a:r>
@@ -11444,14 +11954,14 @@
       </p:sp>
       <p:pic>
         <p:nvPicPr>
-          <p:cNvPr id="5" name="Image 0" descr="assets/University_Overview.png"/>
+          <p:cNvPr id="5" name="Image 0" descr="assets/University_Overview.png">    </p:cNvPr>
           <p:cNvPicPr>
             <a:picLocks noChangeAspect="1"/>
           </p:cNvPicPr>
           <p:nvPr/>
         </p:nvPicPr>
         <p:blipFill>
-          <a:blip r:embed="rId3"/>
+          <a:blip r:embed="rId1"/>
           <a:stretch>
             <a:fillRect/>
           </a:stretch>
@@ -11487,7 +11997,7 @@
           <a:bodyPr wrap="square" lIns="0" tIns="0" rIns="0" bIns="0" rtlCol="0" anchor="ctr"/>
           <a:lstStyle/>
           <a:p>
-            <a:pPr marL="0" indent="0">
+            <a:pPr indent="0" marL="0">
               <a:buNone/>
             </a:pPr>
             <a:r>
@@ -11632,7 +12142,7 @@
           <a:bodyPr wrap="square" lIns="0" tIns="0" rIns="0" bIns="0" rtlCol="0" anchor="ctr"/>
           <a:lstStyle/>
           <a:p>
-            <a:pPr marL="0" indent="0">
+            <a:pPr indent="0" marL="0">
               <a:buNone/>
             </a:pPr>
             <a:r>
@@ -11647,6 +12157,45 @@
               <a:t>Actual Tableau dashboard from the completed EduVision project.</a:t>
             </a:r>
             <a:endParaRPr lang="en-US" sz="950" dirty="0"/>
+          </a:p>
+        </p:txBody>
+      </p:sp>
+      <p:sp>
+        <p:nvSpPr>
+          <p:cNvPr id="9" name="Text 6"/>
+          <p:cNvSpPr/>
+          <p:nvPr/>
+        </p:nvSpPr>
+        <p:spPr>
+          <a:xfrm>
+            <a:off x="457200" y="6537960"/>
+            <a:ext cx="5486400" cy="274320"/>
+          </a:xfrm>
+          <a:prstGeom prst="rect">
+            <a:avLst/>
+          </a:prstGeom>
+          <a:noFill/>
+          <a:ln/>
+        </p:spPr>
+        <p:txBody>
+          <a:bodyPr wrap="square" lIns="0" tIns="0" rIns="0" bIns="0" rtlCol="0" anchor="ctr"/>
+          <a:lstStyle/>
+          <a:p>
+            <a:pPr algn="l" indent="0" marL="0">
+              <a:buNone/>
+            </a:pPr>
+            <a:r>
+              <a:rPr lang="en-US" sz="900" dirty="0">
+                <a:solidFill>
+                  <a:srgbClr val="B0AFD3"/>
+                </a:solidFill>
+                <a:latin typeface="Arial" pitchFamily="34" charset="0"/>
+                <a:ea typeface="Arial" pitchFamily="34" charset="-122"/>
+                <a:cs typeface="Arial" pitchFamily="34" charset="-120"/>
+              </a:rPr>
+              <a:t>EduVision</a:t>
+            </a:r>
+            <a:endParaRPr lang="en-US" sz="900" dirty="0"/>
           </a:p>
         </p:txBody>
       </p:sp>
@@ -11671,7 +12220,7 @@
           <a:bodyPr wrap="square" lIns="0" tIns="0" rIns="0" bIns="0" rtlCol="0" anchor="ctr"/>
           <a:lstStyle/>
           <a:p>
-            <a:pPr marL="0" indent="0" algn="r">
+            <a:pPr algn="r" indent="0" marL="0">
               <a:buNone/>
             </a:pPr>
             <a:r>
@@ -11990,299 +12539,4 @@
     </a:ext>
   </a:extLst>
 </a:theme>
-</file>
-
-<file path=ppt/theme/theme2.xml><?xml version="1.0" encoding="utf-8"?>
-<a:theme xmlns:a="http://schemas.openxmlformats.org/drawingml/2006/main" name="Office Theme">
-  <a:themeElements>
-    <a:clrScheme name="Office">
-      <a:dk1>
-        <a:sysClr val="windowText" lastClr="000000"/>
-      </a:dk1>
-      <a:lt1>
-        <a:sysClr val="window" lastClr="FFFFFF"/>
-      </a:lt1>
-      <a:dk2>
-        <a:srgbClr val="44546A"/>
-      </a:dk2>
-      <a:lt2>
-        <a:srgbClr val="E7E6E6"/>
-      </a:lt2>
-      <a:accent1>
-        <a:srgbClr val="4472C4"/>
-      </a:accent1>
-      <a:accent2>
-        <a:srgbClr val="ED7D31"/>
-      </a:accent2>
-      <a:accent3>
-        <a:srgbClr val="A5A5A5"/>
-      </a:accent3>
-      <a:accent4>
-        <a:srgbClr val="FFC000"/>
-      </a:accent4>
-      <a:accent5>
-        <a:srgbClr val="5B9BD5"/>
-      </a:accent5>
-      <a:accent6>
-        <a:srgbClr val="70AD47"/>
-      </a:accent6>
-      <a:hlink>
-        <a:srgbClr val="0563C1"/>
-      </a:hlink>
-      <a:folHlink>
-        <a:srgbClr val="954F72"/>
-      </a:folHlink>
-    </a:clrScheme>
-    <a:fontScheme name="Office">
-      <a:majorFont>
-        <a:latin typeface="Calibri Light" panose="020F0302020204030204"/>
-        <a:ea typeface=""/>
-        <a:cs typeface=""/>
-        <a:font script="Jpan" typeface="游ゴシック Light"/>
-        <a:font script="Hang" typeface="맑은 고딕"/>
-        <a:font script="Hans" typeface="等线 Light"/>
-        <a:font script="Hant" typeface="新細明體"/>
-        <a:font script="Arab" typeface="Times New Roman"/>
-        <a:font script="Hebr" typeface="Times New Roman"/>
-        <a:font script="Thai" typeface="Angsana New"/>
-        <a:font script="Ethi" typeface="Nyala"/>
-        <a:font script="Beng" typeface="Vrinda"/>
-        <a:font script="Gujr" typeface="Shruti"/>
-        <a:font script="Khmr" typeface="MoolBoran"/>
-        <a:font script="Knda" typeface="Tunga"/>
-        <a:font script="Guru" typeface="Raavi"/>
-        <a:font script="Cans" typeface="Euphemia"/>
-        <a:font script="Cher" typeface="Plantagenet Cherokee"/>
-        <a:font script="Yiii" typeface="Microsoft Yi Baiti"/>
-        <a:font script="Tibt" typeface="Microsoft Himalaya"/>
-        <a:font script="Thaa" typeface="MV Boli"/>
-        <a:font script="Deva" typeface="Mangal"/>
-        <a:font script="Telu" typeface="Gautami"/>
-        <a:font script="Taml" typeface="Latha"/>
-        <a:font script="Syrc" typeface="Estrangelo Edessa"/>
-        <a:font script="Orya" typeface="Kalinga"/>
-        <a:font script="Mlym" typeface="Kartika"/>
-        <a:font script="Laoo" typeface="DokChampa"/>
-        <a:font script="Sinh" typeface="Iskoola Pota"/>
-        <a:font script="Mong" typeface="Mongolian Baiti"/>
-        <a:font script="Viet" typeface="Times New Roman"/>
-        <a:font script="Uigh" typeface="Microsoft Uighur"/>
-        <a:font script="Geor" typeface="Sylfaen"/>
-        <a:font script="Armn" typeface="Arial"/>
-        <a:font script="Bugi" typeface="Leelawadee UI"/>
-        <a:font script="Bopo" typeface="Microsoft JhengHei"/>
-        <a:font script="Java" typeface="Javanese Text"/>
-        <a:font script="Lisu" typeface="Segoe UI"/>
-        <a:font script="Mymr" typeface="Myanmar Text"/>
-        <a:font script="Nkoo" typeface="Ebrima"/>
-        <a:font script="Olck" typeface="Nirmala UI"/>
-        <a:font script="Osma" typeface="Ebrima"/>
-        <a:font script="Phag" typeface="Phagspa"/>
-        <a:font script="Syrn" typeface="Estrangelo Edessa"/>
-        <a:font script="Syrj" typeface="Estrangelo Edessa"/>
-        <a:font script="Syre" typeface="Estrangelo Edessa"/>
-        <a:font script="Sora" typeface="Nirmala UI"/>
-        <a:font script="Tale" typeface="Microsoft Tai Le"/>
-        <a:font script="Talu" typeface="Microsoft New Tai Lue"/>
-        <a:font script="Tfng" typeface="Ebrima"/>
-      </a:majorFont>
-      <a:minorFont>
-        <a:latin typeface="Calibri" panose="020F0502020204030204"/>
-        <a:ea typeface=""/>
-        <a:cs typeface=""/>
-        <a:font script="Jpan" typeface="游ゴシック"/>
-        <a:font script="Hang" typeface="맑은 고딕"/>
-        <a:font script="Hans" typeface="等线"/>
-        <a:font script="Hant" typeface="新細明體"/>
-        <a:font script="Arab" typeface="Arial"/>
-        <a:font script="Hebr" typeface="Arial"/>
-        <a:font script="Thai" typeface="Cordia New"/>
-        <a:font script="Ethi" typeface="Nyala"/>
-        <a:font script="Beng" typeface="Vrinda"/>
-        <a:font script="Gujr" typeface="Shruti"/>
-        <a:font script="Khmr" typeface="DaunPenh"/>
-        <a:font script="Knda" typeface="Tunga"/>
-        <a:font script="Guru" typeface="Raavi"/>
-        <a:font script="Cans" typeface="Euphemia"/>
-        <a:font script="Cher" typeface="Plantagenet Cherokee"/>
-        <a:font script="Yiii" typeface="Microsoft Yi Baiti"/>
-        <a:font script="Tibt" typeface="Microsoft Himalaya"/>
-        <a:font script="Thaa" typeface="MV Boli"/>
-        <a:font script="Deva" typeface="Mangal"/>
-        <a:font script="Telu" typeface="Gautami"/>
-        <a:font script="Taml" typeface="Latha"/>
-        <a:font script="Syrc" typeface="Estrangelo Edessa"/>
-        <a:font script="Orya" typeface="Kalinga"/>
-        <a:font script="Mlym" typeface="Kartika"/>
-        <a:font script="Laoo" typeface="DokChampa"/>
-        <a:font script="Sinh" typeface="Iskoola Pota"/>
-        <a:font script="Mong" typeface="Mongolian Baiti"/>
-        <a:font script="Viet" typeface="Arial"/>
-        <a:font script="Uigh" typeface="Microsoft Uighur"/>
-        <a:font script="Geor" typeface="Sylfaen"/>
-        <a:font script="Armn" typeface="Arial"/>
-        <a:font script="Bugi" typeface="Leelawadee UI"/>
-        <a:font script="Bopo" typeface="Microsoft JhengHei"/>
-        <a:font script="Java" typeface="Javanese Text"/>
-        <a:font script="Lisu" typeface="Segoe UI"/>
-        <a:font script="Mymr" typeface="Myanmar Text"/>
-        <a:font script="Nkoo" typeface="Ebrima"/>
-        <a:font script="Olck" typeface="Nirmala UI"/>
-        <a:font script="Osma" typeface="Ebrima"/>
-        <a:font script="Phag" typeface="Phagspa"/>
-        <a:font script="Syrn" typeface="Estrangelo Edessa"/>
-        <a:font script="Syrj" typeface="Estrangelo Edessa"/>
-        <a:font script="Syre" typeface="Estrangelo Edessa"/>
-        <a:font script="Sora" typeface="Nirmala UI"/>
-        <a:font script="Tale" typeface="Microsoft Tai Le"/>
-        <a:font script="Talu" typeface="Microsoft New Tai Lue"/>
-        <a:font script="Tfng" typeface="Ebrima"/>
-      </a:minorFont>
-    </a:fontScheme>
-    <a:fmtScheme name="Office">
-      <a:fillStyleLst>
-        <a:solidFill>
-          <a:schemeClr val="phClr"/>
-        </a:solidFill>
-        <a:gradFill rotWithShape="1">
-          <a:gsLst>
-            <a:gs pos="0">
-              <a:schemeClr val="phClr">
-                <a:lumMod val="110000"/>
-                <a:satMod val="105000"/>
-                <a:tint val="67000"/>
-              </a:schemeClr>
-            </a:gs>
-            <a:gs pos="50000">
-              <a:schemeClr val="phClr">
-                <a:lumMod val="105000"/>
-                <a:satMod val="103000"/>
-                <a:tint val="73000"/>
-              </a:schemeClr>
-            </a:gs>
-            <a:gs pos="100000">
-              <a:schemeClr val="phClr">
-                <a:lumMod val="105000"/>
-                <a:satMod val="109000"/>
-                <a:tint val="81000"/>
-              </a:schemeClr>
-            </a:gs>
-          </a:gsLst>
-          <a:lin ang="5400000" scaled="0"/>
-        </a:gradFill>
-        <a:gradFill rotWithShape="1">
-          <a:gsLst>
-            <a:gs pos="0">
-              <a:schemeClr val="phClr">
-                <a:satMod val="103000"/>
-                <a:lumMod val="102000"/>
-                <a:tint val="94000"/>
-              </a:schemeClr>
-            </a:gs>
-            <a:gs pos="50000">
-              <a:schemeClr val="phClr">
-                <a:satMod val="110000"/>
-                <a:lumMod val="100000"/>
-                <a:shade val="100000"/>
-              </a:schemeClr>
-            </a:gs>
-            <a:gs pos="100000">
-              <a:schemeClr val="phClr">
-                <a:lumMod val="99000"/>
-                <a:satMod val="120000"/>
-                <a:shade val="78000"/>
-              </a:schemeClr>
-            </a:gs>
-          </a:gsLst>
-          <a:lin ang="5400000" scaled="0"/>
-        </a:gradFill>
-      </a:fillStyleLst>
-      <a:lnStyleLst>
-        <a:ln w="6350" cap="flat" cmpd="sng" algn="ctr">
-          <a:solidFill>
-            <a:schemeClr val="phClr"/>
-          </a:solidFill>
-          <a:prstDash val="solid"/>
-          <a:miter lim="800000"/>
-        </a:ln>
-        <a:ln w="12700" cap="flat" cmpd="sng" algn="ctr">
-          <a:solidFill>
-            <a:schemeClr val="phClr"/>
-          </a:solidFill>
-          <a:prstDash val="solid"/>
-          <a:miter lim="800000"/>
-        </a:ln>
-        <a:ln w="19050" cap="flat" cmpd="sng" algn="ctr">
-          <a:solidFill>
-            <a:schemeClr val="phClr"/>
-          </a:solidFill>
-          <a:prstDash val="solid"/>
-          <a:miter lim="800000"/>
-        </a:ln>
-      </a:lnStyleLst>
-      <a:effectStyleLst>
-        <a:effectStyle>
-          <a:effectLst/>
-        </a:effectStyle>
-        <a:effectStyle>
-          <a:effectLst/>
-        </a:effectStyle>
-        <a:effectStyle>
-          <a:effectLst>
-            <a:outerShdw blurRad="57150" dist="19050" dir="5400000" algn="ctr" rotWithShape="0">
-              <a:srgbClr val="000000">
-                <a:alpha val="63000"/>
-              </a:srgbClr>
-            </a:outerShdw>
-          </a:effectLst>
-        </a:effectStyle>
-      </a:effectStyleLst>
-      <a:bgFillStyleLst>
-        <a:solidFill>
-          <a:schemeClr val="phClr"/>
-        </a:solidFill>
-        <a:solidFill>
-          <a:schemeClr val="phClr">
-            <a:tint val="95000"/>
-            <a:satMod val="170000"/>
-          </a:schemeClr>
-        </a:solidFill>
-        <a:gradFill rotWithShape="1">
-          <a:gsLst>
-            <a:gs pos="0">
-              <a:schemeClr val="phClr">
-                <a:tint val="93000"/>
-                <a:satMod val="150000"/>
-                <a:shade val="98000"/>
-                <a:lumMod val="102000"/>
-              </a:schemeClr>
-            </a:gs>
-            <a:gs pos="50000">
-              <a:schemeClr val="phClr">
-                <a:tint val="98000"/>
-                <a:satMod val="130000"/>
-                <a:shade val="90000"/>
-                <a:lumMod val="103000"/>
-              </a:schemeClr>
-            </a:gs>
-            <a:gs pos="100000">
-              <a:schemeClr val="phClr">
-                <a:shade val="63000"/>
-                <a:satMod val="120000"/>
-              </a:schemeClr>
-            </a:gs>
-          </a:gsLst>
-          <a:lin ang="5400000" scaled="0"/>
-        </a:gradFill>
-      </a:bgFillStyleLst>
-    </a:fmtScheme>
-  </a:themeElements>
-  <a:objectDefaults/>
-  <a:extraClrSchemeLst/>
-  <a:extLst>
-    <a:ext uri="{05A4C25C-085E-4340-85A3-A5531E510DB2}">
-      <thm15:themeFamily xmlns:thm15="http://schemas.microsoft.com/office/thememl/2012/main" name="Office Theme" id="{62F939B6-93AF-4DB8-9C6B-D6C7DFDC589F}" vid="{4A3C46E8-61CC-4603-A589-7422A47A8E4A}"/>
-    </a:ext>
-  </a:extLst>
-</a:theme>
 </file>